--- a/CMPE597_Group13.pptx
+++ b/CMPE597_Group13.pptx
@@ -4,6 +4,9 @@
   <p:sldMasterIdLst>
     <p:sldMasterId id="2147483648" r:id="rId1"/>
   </p:sldMasterIdLst>
+  <p:notesMasterIdLst>
+    <p:notesMasterId r:id="rId22"/>
+  </p:notesMasterIdLst>
   <p:sldIdLst>
     <p:sldId id="256" r:id="rId2"/>
     <p:sldId id="257" r:id="rId3"/>
@@ -142,6 +145,439 @@
 </p:presentation>
 </file>
 
+<file path=ppt/notesMasters/notesMaster1.xml><?xml version="1.0" encoding="utf-8"?>
+<p:notesMaster xmlns:a="http://schemas.openxmlformats.org/drawingml/2006/main" xmlns:r="http://schemas.openxmlformats.org/officeDocument/2006/relationships" xmlns:p="http://schemas.openxmlformats.org/presentationml/2006/main">
+  <p:cSld>
+    <p:bg>
+      <p:bgRef idx="1001">
+        <a:schemeClr val="bg1"/>
+      </p:bgRef>
+    </p:bg>
+    <p:spTree>
+      <p:nvGrpSpPr>
+        <p:cNvPr id="1" name=""/>
+        <p:cNvGrpSpPr/>
+        <p:nvPr/>
+      </p:nvGrpSpPr>
+      <p:grpSpPr>
+        <a:xfrm>
+          <a:off x="0" y="0"/>
+          <a:ext cx="0" cy="0"/>
+          <a:chOff x="0" y="0"/>
+          <a:chExt cx="0" cy="0"/>
+        </a:xfrm>
+      </p:grpSpPr>
+      <p:sp>
+        <p:nvSpPr>
+          <p:cNvPr id="2" name="Üst Bilgi Yer Tutucusu 1"/>
+          <p:cNvSpPr>
+            <a:spLocks noGrp="1"/>
+          </p:cNvSpPr>
+          <p:nvPr>
+            <p:ph type="hdr" sz="quarter"/>
+          </p:nvPr>
+        </p:nvSpPr>
+        <p:spPr>
+          <a:xfrm>
+            <a:off x="0" y="0"/>
+            <a:ext cx="2971800" cy="458788"/>
+          </a:xfrm>
+          <a:prstGeom prst="rect">
+            <a:avLst/>
+          </a:prstGeom>
+        </p:spPr>
+        <p:txBody>
+          <a:bodyPr vert="horz" lIns="91440" tIns="45720" rIns="91440" bIns="45720" rtlCol="0"/>
+          <a:lstStyle>
+            <a:lvl1pPr algn="l">
+              <a:defRPr sz="1200"/>
+            </a:lvl1pPr>
+          </a:lstStyle>
+          <a:p>
+            <a:endParaRPr lang="tr-TR"/>
+          </a:p>
+        </p:txBody>
+      </p:sp>
+      <p:sp>
+        <p:nvSpPr>
+          <p:cNvPr id="3" name="Veri Yer Tutucusu 2"/>
+          <p:cNvSpPr>
+            <a:spLocks noGrp="1"/>
+          </p:cNvSpPr>
+          <p:nvPr>
+            <p:ph type="dt" idx="1"/>
+          </p:nvPr>
+        </p:nvSpPr>
+        <p:spPr>
+          <a:xfrm>
+            <a:off x="3884613" y="0"/>
+            <a:ext cx="2971800" cy="458788"/>
+          </a:xfrm>
+          <a:prstGeom prst="rect">
+            <a:avLst/>
+          </a:prstGeom>
+        </p:spPr>
+        <p:txBody>
+          <a:bodyPr vert="horz" lIns="91440" tIns="45720" rIns="91440" bIns="45720" rtlCol="0"/>
+          <a:lstStyle>
+            <a:lvl1pPr algn="r">
+              <a:defRPr sz="1200"/>
+            </a:lvl1pPr>
+          </a:lstStyle>
+          <a:p>
+            <a:fld id="{A322E479-FD2D-45E4-9FF2-6F52B5439251}" type="datetimeFigureOut">
+              <a:rPr lang="tr-TR" smtClean="0"/>
+              <a:t>12.05.2026</a:t>
+            </a:fld>
+            <a:endParaRPr lang="tr-TR"/>
+          </a:p>
+        </p:txBody>
+      </p:sp>
+      <p:sp>
+        <p:nvSpPr>
+          <p:cNvPr id="4" name="Slayt Resmi Yer Tutucusu 3"/>
+          <p:cNvSpPr>
+            <a:spLocks noGrp="1" noRot="1" noChangeAspect="1"/>
+          </p:cNvSpPr>
+          <p:nvPr>
+            <p:ph type="sldImg" idx="2"/>
+          </p:nvPr>
+        </p:nvSpPr>
+        <p:spPr>
+          <a:xfrm>
+            <a:off x="685800" y="1143000"/>
+            <a:ext cx="5486400" cy="3086100"/>
+          </a:xfrm>
+          <a:prstGeom prst="rect">
+            <a:avLst/>
+          </a:prstGeom>
+          <a:noFill/>
+          <a:ln w="12700">
+            <a:solidFill>
+              <a:prstClr val="black"/>
+            </a:solidFill>
+          </a:ln>
+        </p:spPr>
+        <p:txBody>
+          <a:bodyPr vert="horz" lIns="91440" tIns="45720" rIns="91440" bIns="45720" rtlCol="0" anchor="ctr"/>
+          <a:lstStyle/>
+          <a:p>
+            <a:endParaRPr lang="tr-TR"/>
+          </a:p>
+        </p:txBody>
+      </p:sp>
+      <p:sp>
+        <p:nvSpPr>
+          <p:cNvPr id="5" name="Not Yer Tutucusu 4"/>
+          <p:cNvSpPr>
+            <a:spLocks noGrp="1"/>
+          </p:cNvSpPr>
+          <p:nvPr>
+            <p:ph type="body" sz="quarter" idx="3"/>
+          </p:nvPr>
+        </p:nvSpPr>
+        <p:spPr>
+          <a:xfrm>
+            <a:off x="685800" y="4400550"/>
+            <a:ext cx="5486400" cy="3600450"/>
+          </a:xfrm>
+          <a:prstGeom prst="rect">
+            <a:avLst/>
+          </a:prstGeom>
+        </p:spPr>
+        <p:txBody>
+          <a:bodyPr vert="horz" lIns="91440" tIns="45720" rIns="91440" bIns="45720" rtlCol="0"/>
+          <a:lstStyle/>
+          <a:p>
+            <a:pPr lvl="0"/>
+            <a:r>
+              <a:rPr lang="tr-TR"/>
+              <a:t>Asıl metin stillerini düzenlemek için tıklayın</a:t>
+            </a:r>
+          </a:p>
+          <a:p>
+            <a:pPr lvl="1"/>
+            <a:r>
+              <a:rPr lang="tr-TR"/>
+              <a:t>İkinci düzey</a:t>
+            </a:r>
+          </a:p>
+          <a:p>
+            <a:pPr lvl="2"/>
+            <a:r>
+              <a:rPr lang="tr-TR"/>
+              <a:t>Üçüncü düzey</a:t>
+            </a:r>
+          </a:p>
+          <a:p>
+            <a:pPr lvl="3"/>
+            <a:r>
+              <a:rPr lang="tr-TR"/>
+              <a:t>Dördüncü düzey</a:t>
+            </a:r>
+          </a:p>
+          <a:p>
+            <a:pPr lvl="4"/>
+            <a:r>
+              <a:rPr lang="tr-TR"/>
+              <a:t>Beşinci düzey</a:t>
+            </a:r>
+          </a:p>
+        </p:txBody>
+      </p:sp>
+      <p:sp>
+        <p:nvSpPr>
+          <p:cNvPr id="6" name="Alt Bilgi Yer Tutucusu 5"/>
+          <p:cNvSpPr>
+            <a:spLocks noGrp="1"/>
+          </p:cNvSpPr>
+          <p:nvPr>
+            <p:ph type="ftr" sz="quarter" idx="4"/>
+          </p:nvPr>
+        </p:nvSpPr>
+        <p:spPr>
+          <a:xfrm>
+            <a:off x="0" y="8685213"/>
+            <a:ext cx="2971800" cy="458787"/>
+          </a:xfrm>
+          <a:prstGeom prst="rect">
+            <a:avLst/>
+          </a:prstGeom>
+        </p:spPr>
+        <p:txBody>
+          <a:bodyPr vert="horz" lIns="91440" tIns="45720" rIns="91440" bIns="45720" rtlCol="0" anchor="b"/>
+          <a:lstStyle>
+            <a:lvl1pPr algn="l">
+              <a:defRPr sz="1200"/>
+            </a:lvl1pPr>
+          </a:lstStyle>
+          <a:p>
+            <a:endParaRPr lang="tr-TR"/>
+          </a:p>
+        </p:txBody>
+      </p:sp>
+      <p:sp>
+        <p:nvSpPr>
+          <p:cNvPr id="7" name="Slayt Numarası Yer Tutucusu 6"/>
+          <p:cNvSpPr>
+            <a:spLocks noGrp="1"/>
+          </p:cNvSpPr>
+          <p:nvPr>
+            <p:ph type="sldNum" sz="quarter" idx="5"/>
+          </p:nvPr>
+        </p:nvSpPr>
+        <p:spPr>
+          <a:xfrm>
+            <a:off x="3884613" y="8685213"/>
+            <a:ext cx="2971800" cy="458787"/>
+          </a:xfrm>
+          <a:prstGeom prst="rect">
+            <a:avLst/>
+          </a:prstGeom>
+        </p:spPr>
+        <p:txBody>
+          <a:bodyPr vert="horz" lIns="91440" tIns="45720" rIns="91440" bIns="45720" rtlCol="0" anchor="b"/>
+          <a:lstStyle>
+            <a:lvl1pPr algn="r">
+              <a:defRPr sz="1200"/>
+            </a:lvl1pPr>
+          </a:lstStyle>
+          <a:p>
+            <a:fld id="{428E22F2-D78D-4A40-B4EB-15E3FB23EC91}" type="slidenum">
+              <a:rPr lang="tr-TR" smtClean="0"/>
+              <a:t>‹#›</a:t>
+            </a:fld>
+            <a:endParaRPr lang="tr-TR"/>
+          </a:p>
+        </p:txBody>
+      </p:sp>
+    </p:spTree>
+    <p:extLst>
+      <p:ext uri="{BB962C8B-B14F-4D97-AF65-F5344CB8AC3E}">
+        <p14:creationId xmlns:p14="http://schemas.microsoft.com/office/powerpoint/2010/main" val="3066067207"/>
+      </p:ext>
+    </p:extLst>
+  </p:cSld>
+  <p:clrMap bg1="lt1" tx1="dk1" bg2="lt2" tx2="dk2" accent1="accent1" accent2="accent2" accent3="accent3" accent4="accent4" accent5="accent5" accent6="accent6" hlink="hlink" folHlink="folHlink"/>
+  <p:notesStyle>
+    <a:lvl1pPr marL="0" algn="l" defTabSz="914400" rtl="0" eaLnBrk="1" latinLnBrk="0" hangingPunct="1">
+      <a:defRPr sz="1200" kern="1200">
+        <a:solidFill>
+          <a:schemeClr val="tx1"/>
+        </a:solidFill>
+        <a:latin typeface="+mn-lt"/>
+        <a:ea typeface="+mn-ea"/>
+        <a:cs typeface="+mn-cs"/>
+      </a:defRPr>
+    </a:lvl1pPr>
+    <a:lvl2pPr marL="457200" algn="l" defTabSz="914400" rtl="0" eaLnBrk="1" latinLnBrk="0" hangingPunct="1">
+      <a:defRPr sz="1200" kern="1200">
+        <a:solidFill>
+          <a:schemeClr val="tx1"/>
+        </a:solidFill>
+        <a:latin typeface="+mn-lt"/>
+        <a:ea typeface="+mn-ea"/>
+        <a:cs typeface="+mn-cs"/>
+      </a:defRPr>
+    </a:lvl2pPr>
+    <a:lvl3pPr marL="914400" algn="l" defTabSz="914400" rtl="0" eaLnBrk="1" latinLnBrk="0" hangingPunct="1">
+      <a:defRPr sz="1200" kern="1200">
+        <a:solidFill>
+          <a:schemeClr val="tx1"/>
+        </a:solidFill>
+        <a:latin typeface="+mn-lt"/>
+        <a:ea typeface="+mn-ea"/>
+        <a:cs typeface="+mn-cs"/>
+      </a:defRPr>
+    </a:lvl3pPr>
+    <a:lvl4pPr marL="1371600" algn="l" defTabSz="914400" rtl="0" eaLnBrk="1" latinLnBrk="0" hangingPunct="1">
+      <a:defRPr sz="1200" kern="1200">
+        <a:solidFill>
+          <a:schemeClr val="tx1"/>
+        </a:solidFill>
+        <a:latin typeface="+mn-lt"/>
+        <a:ea typeface="+mn-ea"/>
+        <a:cs typeface="+mn-cs"/>
+      </a:defRPr>
+    </a:lvl4pPr>
+    <a:lvl5pPr marL="1828800" algn="l" defTabSz="914400" rtl="0" eaLnBrk="1" latinLnBrk="0" hangingPunct="1">
+      <a:defRPr sz="1200" kern="1200">
+        <a:solidFill>
+          <a:schemeClr val="tx1"/>
+        </a:solidFill>
+        <a:latin typeface="+mn-lt"/>
+        <a:ea typeface="+mn-ea"/>
+        <a:cs typeface="+mn-cs"/>
+      </a:defRPr>
+    </a:lvl5pPr>
+    <a:lvl6pPr marL="2286000" algn="l" defTabSz="914400" rtl="0" eaLnBrk="1" latinLnBrk="0" hangingPunct="1">
+      <a:defRPr sz="1200" kern="1200">
+        <a:solidFill>
+          <a:schemeClr val="tx1"/>
+        </a:solidFill>
+        <a:latin typeface="+mn-lt"/>
+        <a:ea typeface="+mn-ea"/>
+        <a:cs typeface="+mn-cs"/>
+      </a:defRPr>
+    </a:lvl6pPr>
+    <a:lvl7pPr marL="2743200" algn="l" defTabSz="914400" rtl="0" eaLnBrk="1" latinLnBrk="0" hangingPunct="1">
+      <a:defRPr sz="1200" kern="1200">
+        <a:solidFill>
+          <a:schemeClr val="tx1"/>
+        </a:solidFill>
+        <a:latin typeface="+mn-lt"/>
+        <a:ea typeface="+mn-ea"/>
+        <a:cs typeface="+mn-cs"/>
+      </a:defRPr>
+    </a:lvl7pPr>
+    <a:lvl8pPr marL="3200400" algn="l" defTabSz="914400" rtl="0" eaLnBrk="1" latinLnBrk="0" hangingPunct="1">
+      <a:defRPr sz="1200" kern="1200">
+        <a:solidFill>
+          <a:schemeClr val="tx1"/>
+        </a:solidFill>
+        <a:latin typeface="+mn-lt"/>
+        <a:ea typeface="+mn-ea"/>
+        <a:cs typeface="+mn-cs"/>
+      </a:defRPr>
+    </a:lvl8pPr>
+    <a:lvl9pPr marL="3657600" algn="l" defTabSz="914400" rtl="0" eaLnBrk="1" latinLnBrk="0" hangingPunct="1">
+      <a:defRPr sz="1200" kern="1200">
+        <a:solidFill>
+          <a:schemeClr val="tx1"/>
+        </a:solidFill>
+        <a:latin typeface="+mn-lt"/>
+        <a:ea typeface="+mn-ea"/>
+        <a:cs typeface="+mn-cs"/>
+      </a:defRPr>
+    </a:lvl9pPr>
+  </p:notesStyle>
+</p:notesMaster>
+</file>
+
+<file path=ppt/notesSlides/notesSlide1.xml><?xml version="1.0" encoding="utf-8"?>
+<p:notes xmlns:a="http://schemas.openxmlformats.org/drawingml/2006/main" xmlns:r="http://schemas.openxmlformats.org/officeDocument/2006/relationships" xmlns:p="http://schemas.openxmlformats.org/presentationml/2006/main">
+  <p:cSld>
+    <p:spTree>
+      <p:nvGrpSpPr>
+        <p:cNvPr id="1" name=""/>
+        <p:cNvGrpSpPr/>
+        <p:nvPr/>
+      </p:nvGrpSpPr>
+      <p:grpSpPr>
+        <a:xfrm>
+          <a:off x="0" y="0"/>
+          <a:ext cx="0" cy="0"/>
+          <a:chOff x="0" y="0"/>
+          <a:chExt cx="0" cy="0"/>
+        </a:xfrm>
+      </p:grpSpPr>
+      <p:sp>
+        <p:nvSpPr>
+          <p:cNvPr id="2" name="Slayt Resmi Yer Tutucusu 1"/>
+          <p:cNvSpPr>
+            <a:spLocks noGrp="1" noRot="1" noChangeAspect="1"/>
+          </p:cNvSpPr>
+          <p:nvPr>
+            <p:ph type="sldImg"/>
+          </p:nvPr>
+        </p:nvSpPr>
+        <p:spPr/>
+      </p:sp>
+      <p:sp>
+        <p:nvSpPr>
+          <p:cNvPr id="3" name="Not Yer Tutucusu 2"/>
+          <p:cNvSpPr>
+            <a:spLocks noGrp="1"/>
+          </p:cNvSpPr>
+          <p:nvPr>
+            <p:ph type="body" idx="1"/>
+          </p:nvPr>
+        </p:nvSpPr>
+        <p:spPr/>
+        <p:txBody>
+          <a:bodyPr/>
+          <a:lstStyle/>
+          <a:p>
+            <a:endParaRPr lang="tr-TR" dirty="0"/>
+          </a:p>
+        </p:txBody>
+      </p:sp>
+      <p:sp>
+        <p:nvSpPr>
+          <p:cNvPr id="4" name="Slayt Numarası Yer Tutucusu 3"/>
+          <p:cNvSpPr>
+            <a:spLocks noGrp="1"/>
+          </p:cNvSpPr>
+          <p:nvPr>
+            <p:ph type="sldNum" sz="quarter" idx="5"/>
+          </p:nvPr>
+        </p:nvSpPr>
+        <p:spPr/>
+        <p:txBody>
+          <a:bodyPr/>
+          <a:lstStyle/>
+          <a:p>
+            <a:fld id="{428E22F2-D78D-4A40-B4EB-15E3FB23EC91}" type="slidenum">
+              <a:rPr lang="tr-TR" smtClean="0"/>
+              <a:t>3</a:t>
+            </a:fld>
+            <a:endParaRPr lang="tr-TR"/>
+          </a:p>
+        </p:txBody>
+      </p:sp>
+    </p:spTree>
+    <p:extLst>
+      <p:ext uri="{BB962C8B-B14F-4D97-AF65-F5344CB8AC3E}">
+        <p14:creationId xmlns:p14="http://schemas.microsoft.com/office/powerpoint/2010/main" val="87902013"/>
+      </p:ext>
+    </p:extLst>
+  </p:cSld>
+  <p:clrMapOvr>
+    <a:masterClrMapping/>
+  </p:clrMapOvr>
+</p:notes>
+</file>
+
 <file path=ppt/slideLayouts/slideLayout1.xml><?xml version="1.0" encoding="utf-8"?>
 <p:sldLayout xmlns:a="http://schemas.openxmlformats.org/drawingml/2006/main" xmlns:r="http://schemas.openxmlformats.org/officeDocument/2006/relationships" xmlns:p="http://schemas.openxmlformats.org/presentationml/2006/main" type="title" preserve="1">
   <p:cSld name="Title Slide">
@@ -321,7 +757,7 @@
           <a:p>
             <a:fld id="{5BCAD085-E8A6-8845-BD4E-CB4CCA059FC4}" type="datetimeFigureOut">
               <a:rPr lang="en-US" smtClean="0"/>
-              <a:t>5/11/2026</a:t>
+              <a:t>5/12/2026</a:t>
             </a:fld>
             <a:endParaRPr lang="en-US"/>
           </a:p>
@@ -489,7 +925,7 @@
           <a:p>
             <a:fld id="{5BCAD085-E8A6-8845-BD4E-CB4CCA059FC4}" type="datetimeFigureOut">
               <a:rPr lang="en-US" smtClean="0"/>
-              <a:t>5/11/2026</a:t>
+              <a:t>5/12/2026</a:t>
             </a:fld>
             <a:endParaRPr lang="en-US"/>
           </a:p>
@@ -667,7 +1103,7 @@
           <a:p>
             <a:fld id="{5BCAD085-E8A6-8845-BD4E-CB4CCA059FC4}" type="datetimeFigureOut">
               <a:rPr lang="en-US" smtClean="0"/>
-              <a:t>5/11/2026</a:t>
+              <a:t>5/12/2026</a:t>
             </a:fld>
             <a:endParaRPr lang="en-US"/>
           </a:p>
@@ -835,7 +1271,7 @@
           <a:p>
             <a:fld id="{5BCAD085-E8A6-8845-BD4E-CB4CCA059FC4}" type="datetimeFigureOut">
               <a:rPr lang="en-US" smtClean="0"/>
-              <a:t>5/11/2026</a:t>
+              <a:t>5/12/2026</a:t>
             </a:fld>
             <a:endParaRPr lang="en-US"/>
           </a:p>
@@ -1080,7 +1516,7 @@
           <a:p>
             <a:fld id="{5BCAD085-E8A6-8845-BD4E-CB4CCA059FC4}" type="datetimeFigureOut">
               <a:rPr lang="en-US" smtClean="0"/>
-              <a:t>5/11/2026</a:t>
+              <a:t>5/12/2026</a:t>
             </a:fld>
             <a:endParaRPr lang="en-US"/>
           </a:p>
@@ -1365,7 +1801,7 @@
           <a:p>
             <a:fld id="{5BCAD085-E8A6-8845-BD4E-CB4CCA059FC4}" type="datetimeFigureOut">
               <a:rPr lang="en-US" smtClean="0"/>
-              <a:t>5/11/2026</a:t>
+              <a:t>5/12/2026</a:t>
             </a:fld>
             <a:endParaRPr lang="en-US"/>
           </a:p>
@@ -1784,7 +2220,7 @@
           <a:p>
             <a:fld id="{5BCAD085-E8A6-8845-BD4E-CB4CCA059FC4}" type="datetimeFigureOut">
               <a:rPr lang="en-US" smtClean="0"/>
-              <a:t>5/11/2026</a:t>
+              <a:t>5/12/2026</a:t>
             </a:fld>
             <a:endParaRPr lang="en-US"/>
           </a:p>
@@ -1901,7 +2337,7 @@
           <a:p>
             <a:fld id="{5BCAD085-E8A6-8845-BD4E-CB4CCA059FC4}" type="datetimeFigureOut">
               <a:rPr lang="en-US" smtClean="0"/>
-              <a:t>5/11/2026</a:t>
+              <a:t>5/12/2026</a:t>
             </a:fld>
             <a:endParaRPr lang="en-US"/>
           </a:p>
@@ -1996,7 +2432,7 @@
           <a:p>
             <a:fld id="{5BCAD085-E8A6-8845-BD4E-CB4CCA059FC4}" type="datetimeFigureOut">
               <a:rPr lang="en-US" smtClean="0"/>
-              <a:t>5/11/2026</a:t>
+              <a:t>5/12/2026</a:t>
             </a:fld>
             <a:endParaRPr lang="en-US"/>
           </a:p>
@@ -2271,7 +2707,7 @@
           <a:p>
             <a:fld id="{5BCAD085-E8A6-8845-BD4E-CB4CCA059FC4}" type="datetimeFigureOut">
               <a:rPr lang="en-US" smtClean="0"/>
-              <a:t>5/11/2026</a:t>
+              <a:t>5/12/2026</a:t>
             </a:fld>
             <a:endParaRPr lang="en-US"/>
           </a:p>
@@ -2523,7 +2959,7 @@
           <a:p>
             <a:fld id="{5BCAD085-E8A6-8845-BD4E-CB4CCA059FC4}" type="datetimeFigureOut">
               <a:rPr lang="en-US" smtClean="0"/>
-              <a:t>5/11/2026</a:t>
+              <a:t>5/12/2026</a:t>
             </a:fld>
             <a:endParaRPr lang="en-US"/>
           </a:p>
@@ -2734,7 +3170,7 @@
           <a:p>
             <a:fld id="{5BCAD085-E8A6-8845-BD4E-CB4CCA059FC4}" type="datetimeFigureOut">
               <a:rPr lang="en-US" smtClean="0"/>
-              <a:t>5/11/2026</a:t>
+              <a:t>5/12/2026</a:t>
             </a:fld>
             <a:endParaRPr lang="en-US"/>
           </a:p>
@@ -15582,7 +16018,7 @@
         <p:spPr>
           <a:xfrm>
             <a:off x="457200" y="1719072"/>
-            <a:ext cx="5166360" cy="4389120"/>
+            <a:ext cx="5166360" cy="4151201"/>
           </a:xfrm>
           <a:prstGeom prst="rect">
             <a:avLst/>
@@ -15835,7 +16271,25 @@
                 </a:solidFill>
                 <a:latin typeface="Segoe UI"/>
               </a:rPr>
-              <a:t>  •    1. Sanitize captions</a:t>
+              <a:t>  •    1. Sanitize</a:t>
+            </a:r>
+            <a:r>
+              <a:rPr lang="tr-TR" sz="1300" dirty="0">
+                <a:solidFill>
+                  <a:srgbClr val="CCCCCC"/>
+                </a:solidFill>
+                <a:latin typeface="Segoe UI"/>
+              </a:rPr>
+              <a:t> meme</a:t>
+            </a:r>
+            <a:r>
+              <a:rPr sz="1300" dirty="0">
+                <a:solidFill>
+                  <a:srgbClr val="CCCCCC"/>
+                </a:solidFill>
+                <a:latin typeface="Segoe UI"/>
+              </a:rPr>
+              <a:t> captions</a:t>
             </a:r>
             <a:endParaRPr lang="tr-TR" sz="1300" dirty="0">
               <a:solidFill>
@@ -17273,13 +17727,31 @@
               </a:lnSpc>
             </a:pPr>
             <a:r>
-              <a:rPr sz="1350">
+              <a:rPr sz="1350" dirty="0">
                 <a:solidFill>
                   <a:srgbClr val="CCCCCC"/>
                 </a:solidFill>
                 <a:latin typeface="Segoe UI"/>
               </a:rPr>
-              <a:t>  •  CLIP ViT-B/32 embeddings (frozen, 512-d)</a:t>
+              <a:t>  •  CLIP </a:t>
+            </a:r>
+            <a:r>
+              <a:rPr sz="1350" dirty="0" err="1">
+                <a:solidFill>
+                  <a:srgbClr val="CCCCCC"/>
+                </a:solidFill>
+                <a:latin typeface="Segoe UI"/>
+              </a:rPr>
+              <a:t>ViT</a:t>
+            </a:r>
+            <a:r>
+              <a:rPr sz="1350" dirty="0">
+                <a:solidFill>
+                  <a:srgbClr val="CCCCCC"/>
+                </a:solidFill>
+                <a:latin typeface="Segoe UI"/>
+              </a:rPr>
+              <a:t>-B/32 embeddings (frozen, 512-d)</a:t>
             </a:r>
           </a:p>
           <a:p>
@@ -17289,7 +17761,7 @@
               </a:lnSpc>
             </a:pPr>
             <a:r>
-              <a:rPr sz="1350">
+              <a:rPr sz="1350" dirty="0">
                 <a:solidFill>
                   <a:srgbClr val="CCCCCC"/>
                 </a:solidFill>
@@ -17305,14 +17777,29 @@
               </a:lnSpc>
             </a:pPr>
             <a:r>
-              <a:rPr sz="1350">
+              <a:rPr sz="1350" dirty="0">
                 <a:solidFill>
                   <a:srgbClr val="CCCCCC"/>
                 </a:solidFill>
                 <a:latin typeface="Segoe UI"/>
               </a:rPr>
-              <a:t>  •  Optimizer: AdamW</a:t>
-            </a:r>
+              <a:t>  •  Optimizer: </a:t>
+            </a:r>
+            <a:r>
+              <a:rPr sz="1350" dirty="0" err="1">
+                <a:solidFill>
+                  <a:srgbClr val="CCCCCC"/>
+                </a:solidFill>
+                <a:latin typeface="Segoe UI"/>
+              </a:rPr>
+              <a:t>AdamW</a:t>
+            </a:r>
+            <a:endParaRPr sz="1350" dirty="0">
+              <a:solidFill>
+                <a:srgbClr val="CCCCCC"/>
+              </a:solidFill>
+              <a:latin typeface="Segoe UI"/>
+            </a:endParaRPr>
           </a:p>
           <a:p>
             <a:pPr algn="l">
@@ -17321,7 +17808,7 @@
               </a:lnSpc>
             </a:pPr>
             <a:r>
-              <a:rPr sz="1350">
+              <a:rPr sz="1350" dirty="0">
                 <a:solidFill>
                   <a:srgbClr val="CCCCCC"/>
                 </a:solidFill>
@@ -17337,7 +17824,7 @@
               </a:lnSpc>
             </a:pPr>
             <a:r>
-              <a:rPr sz="1350">
+              <a:rPr sz="1350" dirty="0">
                 <a:solidFill>
                   <a:srgbClr val="CCCCCC"/>
                 </a:solidFill>
@@ -17353,13 +17840,31 @@
               </a:lnSpc>
             </a:pPr>
             <a:r>
-              <a:rPr sz="1350">
+              <a:rPr sz="1350" dirty="0">
                 <a:solidFill>
                   <a:srgbClr val="CCCCCC"/>
                 </a:solidFill>
                 <a:latin typeface="Segoe UI"/>
               </a:rPr>
-              <a:t>  •  Early stop: patience=10 on val Macro F1</a:t>
+              <a:t>  •  Early stop: patience=10 on </a:t>
+            </a:r>
+            <a:r>
+              <a:rPr sz="1350" dirty="0" err="1">
+                <a:solidFill>
+                  <a:srgbClr val="CCCCCC"/>
+                </a:solidFill>
+                <a:latin typeface="Segoe UI"/>
+              </a:rPr>
+              <a:t>val</a:t>
+            </a:r>
+            <a:r>
+              <a:rPr sz="1350" dirty="0">
+                <a:solidFill>
+                  <a:srgbClr val="CCCCCC"/>
+                </a:solidFill>
+                <a:latin typeface="Segoe UI"/>
+              </a:rPr>
+              <a:t> Macro F1</a:t>
             </a:r>
           </a:p>
           <a:p>
@@ -17369,13 +17874,31 @@
               </a:lnSpc>
             </a:pPr>
             <a:r>
-              <a:rPr sz="1350">
+              <a:rPr sz="1350" dirty="0">
                 <a:solidFill>
                   <a:srgbClr val="CCCCCC"/>
                 </a:solidFill>
                 <a:latin typeface="Segoe UI"/>
               </a:rPr>
-              <a:t>  •  Split: 5,160 train / 504 val / 559 test</a:t>
+              <a:t>  •  Split: 5,160 train / 504 </a:t>
+            </a:r>
+            <a:r>
+              <a:rPr sz="1350" dirty="0" err="1">
+                <a:solidFill>
+                  <a:srgbClr val="CCCCCC"/>
+                </a:solidFill>
+                <a:latin typeface="Segoe UI"/>
+              </a:rPr>
+              <a:t>val</a:t>
+            </a:r>
+            <a:r>
+              <a:rPr sz="1350" dirty="0">
+                <a:solidFill>
+                  <a:srgbClr val="CCCCCC"/>
+                </a:solidFill>
+                <a:latin typeface="Segoe UI"/>
+              </a:rPr>
+              <a:t> / 559 test</a:t>
             </a:r>
           </a:p>
         </p:txBody>
@@ -17803,7 +18326,7 @@
                     <a:p>
                       <a:pPr algn="ctr"/>
                       <a:r>
-                        <a:rPr sz="1300" b="0">
+                        <a:rPr sz="1300" b="0" dirty="0">
                           <a:solidFill>
                             <a:srgbClr val="FFFFFF"/>
                           </a:solidFill>
@@ -18024,7 +18547,7 @@
                     <a:p>
                       <a:pPr algn="ctr"/>
                       <a:r>
-                        <a:rPr sz="1300" b="0">
+                        <a:rPr sz="1300" b="0" dirty="0">
                           <a:solidFill>
                             <a:srgbClr val="FFFFFF"/>
                           </a:solidFill>
@@ -18100,7 +18623,7 @@
                     <a:p>
                       <a:pPr algn="ctr"/>
                       <a:r>
-                        <a:rPr sz="1300" b="0">
+                        <a:rPr sz="1300" b="0" dirty="0">
                           <a:solidFill>
                             <a:srgbClr val="FFFFFF"/>
                           </a:solidFill>
@@ -18420,7 +18943,7 @@
                     <a:p>
                       <a:pPr algn="ctr"/>
                       <a:r>
-                        <a:rPr sz="1300" b="0">
+                        <a:rPr sz="1300" b="0" dirty="0">
                           <a:solidFill>
                             <a:srgbClr val="FFFFFF"/>
                           </a:solidFill>
@@ -23596,7 +24119,7 @@
               </a:lnSpc>
             </a:pPr>
             <a:r>
-              <a:rPr sz="1350">
+              <a:rPr sz="1350" dirty="0">
                 <a:solidFill>
                   <a:srgbClr val="CCCCCC"/>
                 </a:solidFill>
@@ -23612,7 +24135,7 @@
               </a:lnSpc>
             </a:pPr>
             <a:r>
-              <a:rPr sz="1350">
+              <a:rPr sz="1350" dirty="0">
                 <a:solidFill>
                   <a:srgbClr val="CCCCCC"/>
                 </a:solidFill>
@@ -23628,7 +24151,7 @@
               </a:lnSpc>
             </a:pPr>
             <a:r>
-              <a:rPr sz="1350" b="1">
+              <a:rPr sz="1350" b="1" dirty="0">
                 <a:solidFill>
                   <a:srgbClr val="00B4D8"/>
                 </a:solidFill>
@@ -23644,7 +24167,7 @@
               </a:lnSpc>
             </a:pPr>
             <a:r>
-              <a:rPr sz="1350">
+              <a:rPr sz="1350" dirty="0">
                 <a:solidFill>
                   <a:srgbClr val="CCCCCC"/>
                 </a:solidFill>
@@ -23660,7 +24183,7 @@
               </a:lnSpc>
             </a:pPr>
             <a:r>
-              <a:rPr sz="1350">
+              <a:rPr sz="1350" dirty="0">
                 <a:solidFill>
                   <a:srgbClr val="CCCCCC"/>
                 </a:solidFill>
@@ -23676,7 +24199,7 @@
               </a:lnSpc>
             </a:pPr>
             <a:r>
-              <a:rPr sz="1350" b="1">
+              <a:rPr sz="1350" b="1" dirty="0">
                 <a:solidFill>
                   <a:srgbClr val="00B4D8"/>
                 </a:solidFill>
@@ -23692,7 +24215,7 @@
               </a:lnSpc>
             </a:pPr>
             <a:r>
-              <a:rPr sz="1350">
+              <a:rPr sz="1350" dirty="0">
                 <a:solidFill>
                   <a:srgbClr val="CCCCCC"/>
                 </a:solidFill>
@@ -23708,7 +24231,7 @@
               </a:lnSpc>
             </a:pPr>
             <a:r>
-              <a:rPr sz="1350">
+              <a:rPr sz="1350" dirty="0">
                 <a:solidFill>
                   <a:srgbClr val="CCCCCC"/>
                 </a:solidFill>
@@ -23724,7 +24247,7 @@
               </a:lnSpc>
             </a:pPr>
             <a:r>
-              <a:rPr sz="1350">
+              <a:rPr sz="1350" dirty="0">
                 <a:solidFill>
                   <a:srgbClr val="CCCCCC"/>
                 </a:solidFill>
@@ -23740,7 +24263,7 @@
               </a:lnSpc>
             </a:pPr>
             <a:r>
-              <a:rPr sz="1350">
+              <a:rPr sz="1350" dirty="0">
                 <a:solidFill>
                   <a:srgbClr val="CCCCCC"/>
                 </a:solidFill>
@@ -23756,13 +24279,31 @@
               </a:lnSpc>
             </a:pPr>
             <a:r>
-              <a:rPr sz="1350">
+              <a:rPr sz="1350" dirty="0">
                 <a:solidFill>
                   <a:srgbClr val="CCCCCC"/>
                 </a:solidFill>
                 <a:latin typeface="Segoe UI"/>
               </a:rPr>
-              <a:t>  •    MedR  — median rank</a:t>
+              <a:t>  •    </a:t>
+            </a:r>
+            <a:r>
+              <a:rPr sz="1350" dirty="0" err="1">
+                <a:solidFill>
+                  <a:srgbClr val="CCCCCC"/>
+                </a:solidFill>
+                <a:latin typeface="Segoe UI"/>
+              </a:rPr>
+              <a:t>MedR</a:t>
+            </a:r>
+            <a:r>
+              <a:rPr sz="1350" dirty="0">
+                <a:solidFill>
+                  <a:srgbClr val="CCCCCC"/>
+                </a:solidFill>
+                <a:latin typeface="Segoe UI"/>
+              </a:rPr>
+              <a:t>  — median rank</a:t>
             </a:r>
           </a:p>
           <a:p>
@@ -23772,7 +24313,7 @@
               </a:lnSpc>
             </a:pPr>
             <a:r>
-              <a:rPr sz="1350">
+              <a:rPr sz="1350" dirty="0">
                 <a:solidFill>
                   <a:srgbClr val="CCCCCC"/>
                 </a:solidFill>
@@ -23890,7 +24431,7 @@
               </a:lnSpc>
             </a:pPr>
             <a:r>
-              <a:rPr sz="1350">
+              <a:rPr sz="1350" dirty="0">
                 <a:solidFill>
                   <a:srgbClr val="CCCCCC"/>
                 </a:solidFill>
@@ -23906,7 +24447,7 @@
               </a:lnSpc>
             </a:pPr>
             <a:r>
-              <a:rPr sz="1350" b="1">
+              <a:rPr sz="1350" b="1" dirty="0">
                 <a:solidFill>
                   <a:srgbClr val="00B4D8"/>
                 </a:solidFill>
@@ -23922,7 +24463,7 @@
               </a:lnSpc>
             </a:pPr>
             <a:r>
-              <a:rPr sz="1350">
+              <a:rPr sz="1350" dirty="0">
                 <a:solidFill>
                   <a:srgbClr val="CCCCCC"/>
                 </a:solidFill>
@@ -23938,7 +24479,7 @@
               </a:lnSpc>
             </a:pPr>
             <a:r>
-              <a:rPr sz="1350">
+              <a:rPr sz="1350" dirty="0">
                 <a:solidFill>
                   <a:srgbClr val="CCCCCC"/>
                 </a:solidFill>
@@ -23954,13 +24495,31 @@
               </a:lnSpc>
             </a:pPr>
             <a:r>
-              <a:rPr sz="1350">
+              <a:rPr sz="1350" dirty="0">
                 <a:solidFill>
                   <a:srgbClr val="CCCCCC"/>
                 </a:solidFill>
                 <a:latin typeface="Segoe UI"/>
               </a:rPr>
-              <a:t>  •    img_caption  → literal image description</a:t>
+              <a:t>  •    </a:t>
+            </a:r>
+            <a:r>
+              <a:rPr sz="1350" dirty="0" err="1">
+                <a:solidFill>
+                  <a:srgbClr val="CCCCCC"/>
+                </a:solidFill>
+                <a:latin typeface="Segoe UI"/>
+              </a:rPr>
+              <a:t>img_caption</a:t>
+            </a:r>
+            <a:r>
+              <a:rPr sz="1350" dirty="0">
+                <a:solidFill>
+                  <a:srgbClr val="CCCCCC"/>
+                </a:solidFill>
+                <a:latin typeface="Segoe UI"/>
+              </a:rPr>
+              <a:t>  → literal image description</a:t>
             </a:r>
           </a:p>
           <a:p>
@@ -23970,13 +24529,31 @@
               </a:lnSpc>
             </a:pPr>
             <a:r>
-              <a:rPr sz="1350">
+              <a:rPr sz="1350" dirty="0">
                 <a:solidFill>
                   <a:srgbClr val="CCCCCC"/>
                 </a:solidFill>
                 <a:latin typeface="Segoe UI"/>
               </a:rPr>
-              <a:t>  •    meme_caption → poster's intended meaning</a:t>
+              <a:t>  •    </a:t>
+            </a:r>
+            <a:r>
+              <a:rPr sz="1350" dirty="0" err="1">
+                <a:solidFill>
+                  <a:srgbClr val="CCCCCC"/>
+                </a:solidFill>
+                <a:latin typeface="Segoe UI"/>
+              </a:rPr>
+              <a:t>meme_caption</a:t>
+            </a:r>
+            <a:r>
+              <a:rPr sz="1350" dirty="0">
+                <a:solidFill>
+                  <a:srgbClr val="CCCCCC"/>
+                </a:solidFill>
+                <a:latin typeface="Segoe UI"/>
+              </a:rPr>
+              <a:t> → poster's intended meaning</a:t>
             </a:r>
           </a:p>
           <a:p>
@@ -23986,7 +24563,7 @@
               </a:lnSpc>
             </a:pPr>
             <a:r>
-              <a:rPr sz="1350" b="1">
+              <a:rPr sz="1350" b="1" dirty="0">
                 <a:solidFill>
                   <a:srgbClr val="00B4D8"/>
                 </a:solidFill>
@@ -24002,7 +24579,7 @@
               </a:lnSpc>
             </a:pPr>
             <a:r>
-              <a:rPr sz="1350">
+              <a:rPr sz="1350" dirty="0">
                 <a:solidFill>
                   <a:srgbClr val="CCCCCC"/>
                 </a:solidFill>
@@ -24018,7 +24595,7 @@
               </a:lnSpc>
             </a:pPr>
             <a:r>
-              <a:rPr sz="1350">
+              <a:rPr sz="1350" dirty="0">
                 <a:solidFill>
                   <a:srgbClr val="CCCCCC"/>
                 </a:solidFill>
@@ -24034,7 +24611,7 @@
               </a:lnSpc>
             </a:pPr>
             <a:r>
-              <a:rPr sz="1350">
+              <a:rPr sz="1350" dirty="0">
                 <a:solidFill>
                   <a:srgbClr val="CCCCCC"/>
                 </a:solidFill>
@@ -24050,7 +24627,7 @@
               </a:lnSpc>
             </a:pPr>
             <a:r>
-              <a:rPr sz="1350" b="1">
+              <a:rPr sz="1350" b="1" dirty="0">
                 <a:solidFill>
                   <a:srgbClr val="00B4D8"/>
                 </a:solidFill>
@@ -24066,14 +24643,29 @@
               </a:lnSpc>
             </a:pPr>
             <a:r>
-              <a:rPr sz="1350">
+              <a:rPr sz="1350" dirty="0">
                 <a:solidFill>
                   <a:srgbClr val="CCCCCC"/>
                 </a:solidFill>
                 <a:latin typeface="Segoe UI"/>
               </a:rPr>
-              <a:t>  •  Retrieval target: meme_caption</a:t>
-            </a:r>
+              <a:t>  •  Retrieval target: </a:t>
+            </a:r>
+            <a:r>
+              <a:rPr sz="1350" dirty="0" err="1">
+                <a:solidFill>
+                  <a:srgbClr val="CCCCCC"/>
+                </a:solidFill>
+                <a:latin typeface="Segoe UI"/>
+              </a:rPr>
+              <a:t>meme_caption</a:t>
+            </a:r>
+            <a:endParaRPr sz="1350" dirty="0">
+              <a:solidFill>
+                <a:srgbClr val="CCCCCC"/>
+              </a:solidFill>
+              <a:latin typeface="Segoe UI"/>
+            </a:endParaRPr>
           </a:p>
           <a:p>
             <a:pPr algn="l">
@@ -24082,7 +24674,7 @@
               </a:lnSpc>
             </a:pPr>
             <a:r>
-              <a:rPr sz="1350">
+              <a:rPr sz="1350" dirty="0">
                 <a:solidFill>
                   <a:srgbClr val="CCCCCC"/>
                 </a:solidFill>
@@ -25987,13 +26579,31 @@
               </a:lnSpc>
             </a:pPr>
             <a:r>
-              <a:rPr sz="1300">
+              <a:rPr sz="1300" dirty="0">
                 <a:solidFill>
                   <a:srgbClr val="CCCCCC"/>
                 </a:solidFill>
                 <a:latin typeface="Segoe UI"/>
               </a:rPr>
-              <a:t>Base CLIP ViT-B/32 (OpenAI)</a:t>
+              <a:t>Base CLIP </a:t>
+            </a:r>
+            <a:r>
+              <a:rPr sz="1300" dirty="0" err="1">
+                <a:solidFill>
+                  <a:srgbClr val="CCCCCC"/>
+                </a:solidFill>
+                <a:latin typeface="Segoe UI"/>
+              </a:rPr>
+              <a:t>ViT</a:t>
+            </a:r>
+            <a:r>
+              <a:rPr sz="1300" dirty="0">
+                <a:solidFill>
+                  <a:srgbClr val="CCCCCC"/>
+                </a:solidFill>
+                <a:latin typeface="Segoe UI"/>
+              </a:rPr>
+              <a:t>-B/32 (OpenAI)</a:t>
             </a:r>
           </a:p>
           <a:p>
@@ -26003,7 +26613,7 @@
               </a:lnSpc>
             </a:pPr>
             <a:r>
-              <a:rPr sz="1300">
+              <a:rPr sz="1300" dirty="0">
                 <a:solidFill>
                   <a:srgbClr val="CCCCCC"/>
                 </a:solidFill>
@@ -26019,7 +26629,7 @@
               </a:lnSpc>
             </a:pPr>
             <a:r>
-              <a:rPr sz="1300">
+              <a:rPr sz="1300" dirty="0">
                 <a:solidFill>
                   <a:srgbClr val="CCCCCC"/>
                 </a:solidFill>
@@ -26035,7 +26645,7 @@
               </a:lnSpc>
             </a:pPr>
             <a:r>
-              <a:rPr sz="1300">
+              <a:rPr sz="1300" dirty="0">
                 <a:solidFill>
                   <a:srgbClr val="CCCCCC"/>
                 </a:solidFill>
@@ -26051,7 +26661,7 @@
               </a:lnSpc>
             </a:pPr>
             <a:r>
-              <a:rPr sz="1300" b="1">
+              <a:rPr sz="1300" b="1" dirty="0">
                 <a:solidFill>
                   <a:srgbClr val="00B4D8"/>
                 </a:solidFill>
@@ -26067,7 +26677,7 @@
               </a:lnSpc>
             </a:pPr>
             <a:r>
-              <a:rPr sz="1300">
+              <a:rPr sz="1300" dirty="0">
                 <a:solidFill>
                   <a:srgbClr val="CCCCCC"/>
                 </a:solidFill>
@@ -26083,7 +26693,7 @@
               </a:lnSpc>
             </a:pPr>
             <a:r>
-              <a:rPr sz="1300">
+              <a:rPr sz="1300" dirty="0">
                 <a:solidFill>
                   <a:srgbClr val="CCCCCC"/>
                 </a:solidFill>
@@ -26099,7 +26709,7 @@
               </a:lnSpc>
             </a:pPr>
             <a:r>
-              <a:rPr sz="1300">
+              <a:rPr sz="1300" dirty="0">
                 <a:solidFill>
                   <a:srgbClr val="CCCCCC"/>
                 </a:solidFill>
@@ -26810,13 +27420,49 @@
               </a:lnSpc>
             </a:pPr>
             <a:r>
-              <a:rPr sz="1300">
+              <a:rPr sz="1300" dirty="0">
                 <a:solidFill>
                   <a:srgbClr val="CCCCCC"/>
                 </a:solidFill>
                 <a:latin typeface="Segoe UI"/>
               </a:rPr>
-              <a:t>Base: OpenCLIP ViT-B/32 (frozen)</a:t>
+              <a:t>Base: </a:t>
+            </a:r>
+            <a:r>
+              <a:rPr sz="1300" dirty="0" err="1">
+                <a:solidFill>
+                  <a:srgbClr val="CCCCCC"/>
+                </a:solidFill>
+                <a:latin typeface="Segoe UI"/>
+              </a:rPr>
+              <a:t>OpenCLIP</a:t>
+            </a:r>
+            <a:r>
+              <a:rPr sz="1300" dirty="0">
+                <a:solidFill>
+                  <a:srgbClr val="CCCCCC"/>
+                </a:solidFill>
+                <a:latin typeface="Segoe UI"/>
+              </a:rPr>
+              <a:t> </a:t>
+            </a:r>
+            <a:r>
+              <a:rPr sz="1300" dirty="0" err="1">
+                <a:solidFill>
+                  <a:srgbClr val="CCCCCC"/>
+                </a:solidFill>
+                <a:latin typeface="Segoe UI"/>
+              </a:rPr>
+              <a:t>ViT</a:t>
+            </a:r>
+            <a:r>
+              <a:rPr sz="1300" dirty="0">
+                <a:solidFill>
+                  <a:srgbClr val="CCCCCC"/>
+                </a:solidFill>
+                <a:latin typeface="Segoe UI"/>
+              </a:rPr>
+              <a:t>-B/32 (frozen)</a:t>
             </a:r>
           </a:p>
           <a:p>
@@ -26826,13 +27472,22 @@
               </a:lnSpc>
             </a:pPr>
             <a:r>
-              <a:rPr sz="1300">
+              <a:rPr sz="1300" dirty="0" err="1">
                 <a:solidFill>
                   <a:srgbClr val="CCCCCC"/>
                 </a:solidFill>
                 <a:latin typeface="Segoe UI"/>
               </a:rPr>
-              <a:t>LoRA adapters injected into:</a:t>
+              <a:t>LoRA</a:t>
+            </a:r>
+            <a:r>
+              <a:rPr sz="1300" dirty="0">
+                <a:solidFill>
+                  <a:srgbClr val="CCCCCC"/>
+                </a:solidFill>
+                <a:latin typeface="Segoe UI"/>
+              </a:rPr>
+              <a:t> adapters injected into:</a:t>
             </a:r>
           </a:p>
           <a:p>
@@ -26842,14 +27497,29 @@
               </a:lnSpc>
             </a:pPr>
             <a:r>
-              <a:rPr sz="1300">
+              <a:rPr sz="1300" dirty="0">
                 <a:solidFill>
                   <a:srgbClr val="CCCCCC"/>
                 </a:solidFill>
                 <a:latin typeface="Segoe UI"/>
               </a:rPr>
-              <a:t>  attn.out_proj</a:t>
-            </a:r>
+              <a:t>  </a:t>
+            </a:r>
+            <a:r>
+              <a:rPr sz="1300" dirty="0" err="1">
+                <a:solidFill>
+                  <a:srgbClr val="CCCCCC"/>
+                </a:solidFill>
+                <a:latin typeface="Segoe UI"/>
+              </a:rPr>
+              <a:t>attn.out_proj</a:t>
+            </a:r>
+            <a:endParaRPr sz="1300" dirty="0">
+              <a:solidFill>
+                <a:srgbClr val="CCCCCC"/>
+              </a:solidFill>
+              <a:latin typeface="Segoe UI"/>
+            </a:endParaRPr>
           </a:p>
           <a:p>
             <a:pPr algn="l">
@@ -26858,14 +27528,47 @@
               </a:lnSpc>
             </a:pPr>
             <a:r>
-              <a:rPr sz="1300">
+              <a:rPr sz="1300" dirty="0">
                 <a:solidFill>
                   <a:srgbClr val="CCCCCC"/>
                 </a:solidFill>
                 <a:latin typeface="Segoe UI"/>
               </a:rPr>
-              <a:t>  mlp.c_fc / mlp.c_proj</a:t>
-            </a:r>
+              <a:t>  </a:t>
+            </a:r>
+            <a:r>
+              <a:rPr sz="1300" dirty="0" err="1">
+                <a:solidFill>
+                  <a:srgbClr val="CCCCCC"/>
+                </a:solidFill>
+                <a:latin typeface="Segoe UI"/>
+              </a:rPr>
+              <a:t>mlp.c_fc</a:t>
+            </a:r>
+            <a:r>
+              <a:rPr sz="1300" dirty="0">
+                <a:solidFill>
+                  <a:srgbClr val="CCCCCC"/>
+                </a:solidFill>
+                <a:latin typeface="Segoe UI"/>
+              </a:rPr>
+              <a:t> / </a:t>
+            </a:r>
+            <a:r>
+              <a:rPr sz="1300" dirty="0" err="1">
+                <a:solidFill>
+                  <a:srgbClr val="CCCCCC"/>
+                </a:solidFill>
+                <a:latin typeface="Segoe UI"/>
+              </a:rPr>
+              <a:t>mlp.c_proj</a:t>
+            </a:r>
+            <a:endParaRPr sz="1300" dirty="0">
+              <a:solidFill>
+                <a:srgbClr val="CCCCCC"/>
+              </a:solidFill>
+              <a:latin typeface="Segoe UI"/>
+            </a:endParaRPr>
           </a:p>
           <a:p>
             <a:pPr algn="l">
@@ -26874,14 +27577,29 @@
               </a:lnSpc>
             </a:pPr>
             <a:r>
-              <a:rPr sz="1300">
+              <a:rPr sz="1300" dirty="0">
                 <a:solidFill>
                   <a:srgbClr val="CCCCCC"/>
                 </a:solidFill>
                 <a:latin typeface="Segoe UI"/>
               </a:rPr>
-              <a:t>Loss: Symmetric InfoNCE</a:t>
-            </a:r>
+              <a:t>Loss: Symmetric </a:t>
+            </a:r>
+            <a:r>
+              <a:rPr sz="1300" dirty="0" err="1">
+                <a:solidFill>
+                  <a:srgbClr val="CCCCCC"/>
+                </a:solidFill>
+                <a:latin typeface="Segoe UI"/>
+              </a:rPr>
+              <a:t>InfoNCE</a:t>
+            </a:r>
+            <a:endParaRPr sz="1300" dirty="0">
+              <a:solidFill>
+                <a:srgbClr val="CCCCCC"/>
+              </a:solidFill>
+              <a:latin typeface="Segoe UI"/>
+            </a:endParaRPr>
           </a:p>
           <a:p>
             <a:pPr algn="l">
@@ -26890,7 +27608,7 @@
               </a:lnSpc>
             </a:pPr>
             <a:r>
-              <a:rPr sz="1300" b="1">
+              <a:rPr sz="1300" b="1" dirty="0">
                 <a:solidFill>
                   <a:srgbClr val="00B4D8"/>
                 </a:solidFill>
@@ -26906,7 +27624,7 @@
               </a:lnSpc>
             </a:pPr>
             <a:r>
-              <a:rPr sz="1300">
+              <a:rPr sz="1300" dirty="0">
                 <a:solidFill>
                   <a:srgbClr val="CCCCCC"/>
                 </a:solidFill>
@@ -26922,7 +27640,7 @@
               </a:lnSpc>
             </a:pPr>
             <a:r>
-              <a:rPr sz="1300">
+              <a:rPr sz="1300" dirty="0">
                 <a:solidFill>
                   <a:srgbClr val="CCCCCC"/>
                 </a:solidFill>
@@ -26985,7 +27703,7 @@
         </p:nvSpPr>
         <p:spPr>
           <a:xfrm>
-            <a:off x="457200" y="6510528"/>
+            <a:off x="397931" y="6485127"/>
             <a:ext cx="11338560" cy="237744"/>
           </a:xfrm>
           <a:prstGeom prst="rect">
@@ -27001,13 +27719,31 @@
           <a:p>
             <a:pPr algn="l"/>
             <a:r>
-              <a:rPr sz="1300" b="0" i="0">
+              <a:rPr sz="1300" b="0" i="0" dirty="0">
                 <a:solidFill>
                   <a:srgbClr val="FFD600"/>
                 </a:solidFill>
                 <a:latin typeface="Segoe UI"/>
               </a:rPr>
-              <a:t>Shared training details: gradient clipping, cosine annealing, symmetric InfoNCE loss (temperature τ=0.07)</a:t>
+              <a:t>Shared training details: gradient clipping, cosine annealing, symmetric </a:t>
+            </a:r>
+            <a:r>
+              <a:rPr sz="1300" b="0" i="0" dirty="0" err="1">
+                <a:solidFill>
+                  <a:srgbClr val="FFD600"/>
+                </a:solidFill>
+                <a:latin typeface="Segoe UI"/>
+              </a:rPr>
+              <a:t>InfoNCE</a:t>
+            </a:r>
+            <a:r>
+              <a:rPr sz="1300" b="0" i="0" dirty="0">
+                <a:solidFill>
+                  <a:srgbClr val="FFD600"/>
+                </a:solidFill>
+                <a:latin typeface="Segoe UI"/>
+              </a:rPr>
+              <a:t> loss (temperature τ=0.07)</a:t>
             </a:r>
           </a:p>
         </p:txBody>
@@ -27438,13 +28174,40 @@
           <a:p>
             <a:pPr algn="ctr"/>
             <a:r>
-              <a:rPr sz="1300" b="0" i="0">
+              <a:rPr sz="1300" b="0" i="0" dirty="0" err="1">
                 <a:solidFill>
                   <a:srgbClr val="FFFFFF"/>
                 </a:solidFill>
                 <a:latin typeface="Segoe UI"/>
               </a:rPr>
-              <a:t>img_emb ∥ title_emb
+              <a:t>img_emb</a:t>
+            </a:r>
+            <a:r>
+              <a:rPr sz="1300" b="0" i="0" dirty="0">
+                <a:solidFill>
+                  <a:srgbClr val="FFFFFF"/>
+                </a:solidFill>
+                <a:latin typeface="Segoe UI"/>
+              </a:rPr>
+              <a:t> ∥ </a:t>
+            </a:r>
+            <a:r>
+              <a:rPr sz="1300" b="0" i="0" dirty="0" err="1">
+                <a:solidFill>
+                  <a:srgbClr val="FFFFFF"/>
+                </a:solidFill>
+                <a:latin typeface="Segoe UI"/>
+              </a:rPr>
+              <a:t>title_emb</a:t>
+            </a:r>
+            <a:r>
+              <a:rPr sz="1300" b="0" i="0" dirty="0">
+                <a:solidFill>
+                  <a:srgbClr val="FFFFFF"/>
+                </a:solidFill>
+                <a:latin typeface="Segoe UI"/>
+              </a:rPr>
+              <a:t>
 → projected to 256d via MLP</a:t>
             </a:r>
           </a:p>
@@ -28711,15 +29474,51 @@
           <a:p>
             <a:pPr algn="ctr"/>
             <a:r>
-              <a:rPr sz="1300" b="0" i="0">
+              <a:rPr sz="1300" b="0" i="0" dirty="0">
                 <a:solidFill>
                   <a:srgbClr val="FFFFFF"/>
                 </a:solidFill>
                 <a:latin typeface="Segoe UI"/>
               </a:rPr>
               <a:t>Sigmoid gate:
-g = σ(W·[img;title])
-out = g⊙img + (1-g)⊙title</a:t>
+g = σ(W·[</a:t>
+            </a:r>
+            <a:r>
+              <a:rPr sz="1300" b="0" i="0" dirty="0" err="1">
+                <a:solidFill>
+                  <a:srgbClr val="FFFFFF"/>
+                </a:solidFill>
+                <a:latin typeface="Segoe UI"/>
+              </a:rPr>
+              <a:t>img;title</a:t>
+            </a:r>
+            <a:r>
+              <a:rPr sz="1300" b="0" i="0" dirty="0">
+                <a:solidFill>
+                  <a:srgbClr val="FFFFFF"/>
+                </a:solidFill>
+                <a:latin typeface="Segoe UI"/>
+              </a:rPr>
+              <a:t>])
+out = </a:t>
+            </a:r>
+            <a:r>
+              <a:rPr sz="1300" b="0" i="0" dirty="0" err="1">
+                <a:solidFill>
+                  <a:srgbClr val="FFFFFF"/>
+                </a:solidFill>
+                <a:latin typeface="Segoe UI"/>
+              </a:rPr>
+              <a:t>g⊙img</a:t>
+            </a:r>
+            <a:r>
+              <a:rPr sz="1300" b="0" i="0" dirty="0">
+                <a:solidFill>
+                  <a:srgbClr val="FFFFFF"/>
+                </a:solidFill>
+                <a:latin typeface="Segoe UI"/>
+              </a:rPr>
+              <a:t> + (1-g)⊙title</a:t>
             </a:r>
           </a:p>
         </p:txBody>
@@ -32999,7 +33798,7 @@
           <a:p>
             <a:pPr algn="l"/>
             <a:r>
-              <a:rPr sz="1100" b="0" i="1">
+              <a:rPr sz="1100" b="0" i="1" dirty="0">
                 <a:solidFill>
                   <a:srgbClr val="8888AA"/>
                 </a:solidFill>
@@ -33201,7 +34000,7 @@
           <a:p>
             <a:pPr algn="ctr"/>
             <a:r>
-              <a:rPr sz="1300" b="0" i="0">
+              <a:rPr sz="1300" b="0" i="0" dirty="0">
                 <a:solidFill>
                   <a:srgbClr val="CCCCCC"/>
                 </a:solidFill>
@@ -33209,7 +34008,25 @@
               </a:rPr>
               <a:t>R@1 =  1.43%
 R@5 =  3.76%
-MedR = 170
+</a:t>
+            </a:r>
+            <a:r>
+              <a:rPr sz="1300" b="0" i="0" dirty="0" err="1">
+                <a:solidFill>
+                  <a:srgbClr val="CCCCCC"/>
+                </a:solidFill>
+                <a:latin typeface="Segoe UI"/>
+              </a:rPr>
+              <a:t>MedR</a:t>
+            </a:r>
+            <a:r>
+              <a:rPr sz="1300" b="0" i="0" dirty="0">
+                <a:solidFill>
+                  <a:srgbClr val="CCCCCC"/>
+                </a:solidFill>
+                <a:latin typeface="Segoe UI"/>
+              </a:rPr>
+              <a:t> = 170
 Far below zero-shot CLIP
 (45.26%) — no pretraining</a:t>
             </a:r>
@@ -35781,7 +36598,7 @@
           <a:p>
             <a:pPr algn="ctr"/>
             <a:r>
-              <a:rPr sz="1300" b="0" i="0">
+              <a:rPr sz="1300" b="0" i="0" dirty="0">
                 <a:solidFill>
                   <a:srgbClr val="CCCCCC"/>
                 </a:solidFill>
@@ -35789,7 +36606,25 @@
               </a:rPr>
               <a:t>R@1 = 58.14%
 R@5 = 74.06%
-MedR =  1
+</a:t>
+            </a:r>
+            <a:r>
+              <a:rPr sz="1300" b="0" i="0" dirty="0" err="1">
+                <a:solidFill>
+                  <a:srgbClr val="CCCCCC"/>
+                </a:solidFill>
+                <a:latin typeface="Segoe UI"/>
+              </a:rPr>
+              <a:t>MedR</a:t>
+            </a:r>
+            <a:r>
+              <a:rPr sz="1300" b="0" i="0" dirty="0">
+                <a:solidFill>
+                  <a:srgbClr val="CCCCCC"/>
+                </a:solidFill>
+                <a:latin typeface="Segoe UI"/>
+              </a:rPr>
+              <a:t> =  1
 Best result across
 all models &amp; strategies</a:t>
             </a:r>
@@ -36428,13 +37263,22 @@
           <a:p>
             <a:pPr algn="ctr"/>
             <a:r>
-              <a:rPr sz="1250" b="0" i="0">
+              <a:rPr sz="1250" b="0" i="0" dirty="0" err="1">
                 <a:solidFill>
                   <a:srgbClr val="CCCCCC"/>
                 </a:solidFill>
                 <a:latin typeface="Segoe UI"/>
               </a:rPr>
-              <a:t>LoRA Type 1:  R@1 ~50–53%
+              <a:t>LoRA</a:t>
+            </a:r>
+            <a:r>
+              <a:rPr sz="1250" b="0" i="0" dirty="0">
+                <a:solidFill>
+                  <a:srgbClr val="CCCCCC"/>
+                </a:solidFill>
+                <a:latin typeface="Segoe UI"/>
+              </a:rPr>
+              <a:t> Type 1:  R@1 ~50–53%
 Custom Type 1:  R@1 ~0.7–1.4%
 &gt;40 pp gap between pretrained
 and from-scratch models.
@@ -36840,30 +37684,75 @@
           <a:p>
             <a:pPr algn="ctr"/>
             <a:r>
-              <a:rPr sz="1250" b="0" i="0">
+              <a:rPr sz="1250" b="0" i="0" dirty="0" err="1">
                 <a:solidFill>
                   <a:srgbClr val="CCCCCC"/>
                 </a:solidFill>
                 <a:latin typeface="Segoe UI"/>
               </a:rPr>
-              <a:t>weighted_sum is best for CLIP
+              <a:t>weighted_sum</a:t>
+            </a:r>
+            <a:r>
+              <a:rPr sz="1250" b="0" i="0" dirty="0">
+                <a:solidFill>
+                  <a:srgbClr val="CCCCCC"/>
+                </a:solidFill>
+                <a:latin typeface="Segoe UI"/>
+              </a:rPr>
+              <a:t> is best for CLIP
 based Type 2 inputs.
-concat_project collapses on
+</a:t>
+            </a:r>
+            <a:r>
+              <a:rPr sz="1250" b="0" i="0" dirty="0" err="1">
+                <a:solidFill>
+                  <a:srgbClr val="CCCCCC"/>
+                </a:solidFill>
+                <a:latin typeface="Segoe UI"/>
+              </a:rPr>
+              <a:t>concat_project</a:t>
+            </a:r>
+            <a:r>
+              <a:rPr sz="1250" b="0" i="0" dirty="0">
+                <a:solidFill>
+                  <a:srgbClr val="CCCCCC"/>
+                </a:solidFill>
+                <a:latin typeface="Segoe UI"/>
+              </a:rPr>
+              <a:t> collapses on
 zero-shot CLIP Type 2:
-R@1 = 0.36%,  MedR = 290.</a:t>
-            </a:r>
-          </a:p>
-        </p:txBody>
-      </p:sp>
-      <p:sp>
-        <p:nvSpPr>
-          <p:cNvPr id="22" name="Rectangle 21"/>
+R@1 = 0.36%,  </a:t>
+            </a:r>
+            <a:r>
+              <a:rPr sz="1250" b="0" i="0" dirty="0" err="1">
+                <a:solidFill>
+                  <a:srgbClr val="CCCCCC"/>
+                </a:solidFill>
+                <a:latin typeface="Segoe UI"/>
+              </a:rPr>
+              <a:t>MedR</a:t>
+            </a:r>
+            <a:r>
+              <a:rPr sz="1250" b="0" i="0" dirty="0">
+                <a:solidFill>
+                  <a:srgbClr val="CCCCCC"/>
+                </a:solidFill>
+                <a:latin typeface="Segoe UI"/>
+              </a:rPr>
+              <a:t> = 290.</a:t>
+            </a:r>
+          </a:p>
+        </p:txBody>
+      </p:sp>
+      <p:sp>
+        <p:nvSpPr>
+          <p:cNvPr id="27" name="Rectangle 26"/>
           <p:cNvSpPr/>
           <p:nvPr/>
         </p:nvSpPr>
         <p:spPr>
           <a:xfrm>
-            <a:off x="2282951" y="3703320"/>
+            <a:off x="4245864" y="3685032"/>
             <a:ext cx="3697224" cy="2148840"/>
           </a:xfrm>
           <a:prstGeom prst="rect">
@@ -36901,20 +37790,20 @@
       </p:sp>
       <p:sp>
         <p:nvSpPr>
-          <p:cNvPr id="23" name="Rectangle 22"/>
+          <p:cNvPr id="28" name="Rectangle 27"/>
           <p:cNvSpPr/>
           <p:nvPr/>
         </p:nvSpPr>
         <p:spPr>
           <a:xfrm>
-            <a:off x="2282951" y="3703320"/>
+            <a:off x="4245864" y="3685032"/>
             <a:ext cx="3697224" cy="82296"/>
           </a:xfrm>
           <a:prstGeom prst="rect">
             <a:avLst/>
           </a:prstGeom>
           <a:solidFill>
-            <a:srgbClr val="90E0EF"/>
+            <a:srgbClr val="C77DFF"/>
           </a:solidFill>
           <a:ln>
             <a:noFill/>
@@ -36945,13 +37834,13 @@
       </p:sp>
       <p:sp>
         <p:nvSpPr>
-          <p:cNvPr id="24" name="TextBox 23"/>
+          <p:cNvPr id="29" name="TextBox 28"/>
           <p:cNvSpPr txBox="1"/>
           <p:nvPr/>
         </p:nvSpPr>
         <p:spPr>
           <a:xfrm>
-            <a:off x="2447543" y="3813048"/>
+            <a:off x="4410456" y="3794760"/>
             <a:ext cx="3441192" cy="411480"/>
           </a:xfrm>
           <a:prstGeom prst="rect">
@@ -36969,24 +37858,24 @@
             <a:r>
               <a:rPr sz="1450" b="1" i="0">
                 <a:solidFill>
-                  <a:srgbClr val="90E0EF"/>
-                </a:solidFill>
-                <a:latin typeface="Segoe UI"/>
-              </a:rPr>
-              <a:t>Type 1: No Fusion Used</a:t>
-            </a:r>
-          </a:p>
-        </p:txBody>
-      </p:sp>
-      <p:sp>
-        <p:nvSpPr>
-          <p:cNvPr id="25" name="Rectangle 24"/>
+                  <a:srgbClr val="C77DFF"/>
+                </a:solidFill>
+                <a:latin typeface="Segoe UI"/>
+              </a:rPr>
+              <a:t>Gated is Best for Custom</a:t>
+            </a:r>
+          </a:p>
+        </p:txBody>
+      </p:sp>
+      <p:sp>
+        <p:nvSpPr>
+          <p:cNvPr id="30" name="Rectangle 29"/>
           <p:cNvSpPr/>
           <p:nvPr/>
         </p:nvSpPr>
         <p:spPr>
           <a:xfrm>
-            <a:off x="2511551" y="4288536"/>
+            <a:off x="4474464" y="4270248"/>
             <a:ext cx="3240024" cy="36576"/>
           </a:xfrm>
           <a:prstGeom prst="rect">
@@ -37024,219 +37913,13 @@
       </p:sp>
       <p:sp>
         <p:nvSpPr>
-          <p:cNvPr id="26" name="TextBox 25"/>
-          <p:cNvSpPr txBox="1"/>
-          <p:nvPr/>
-        </p:nvSpPr>
-        <p:spPr>
-          <a:xfrm>
-            <a:off x="2447543" y="4361688"/>
-            <a:ext cx="3441192" cy="1417320"/>
-          </a:xfrm>
-          <a:prstGeom prst="rect">
-            <a:avLst/>
-          </a:prstGeom>
-          <a:noFill/>
-        </p:spPr>
-        <p:txBody>
-          <a:bodyPr wrap="square">
-            <a:spAutoFit/>
-          </a:bodyPr>
-          <a:lstStyle/>
-          <a:p>
-            <a:pPr algn="ctr"/>
-            <a:r>
-              <a:rPr sz="1250" b="0" i="0">
-                <a:solidFill>
-                  <a:srgbClr val="CCCCCC"/>
-                </a:solidFill>
-                <a:latin typeface="Segoe UI"/>
-              </a:rPr>
-              <a:t>For image-only queries, the fusion
-module is never called in code.
-Type 1 scores reflect pure image
-representation quality — not fusion.
-Variation across model variants &lt; 3–4 pp.</a:t>
-            </a:r>
-          </a:p>
-        </p:txBody>
-      </p:sp>
-      <p:sp>
-        <p:nvSpPr>
-          <p:cNvPr id="27" name="Rectangle 26"/>
-          <p:cNvSpPr/>
-          <p:nvPr/>
-        </p:nvSpPr>
-        <p:spPr>
-          <a:xfrm>
-            <a:off x="6208776" y="3703320"/>
-            <a:ext cx="3697224" cy="2148840"/>
-          </a:xfrm>
-          <a:prstGeom prst="rect">
-            <a:avLst/>
-          </a:prstGeom>
-          <a:solidFill>
-            <a:srgbClr val="16213E"/>
-          </a:solidFill>
-          <a:ln>
-            <a:noFill/>
-          </a:ln>
-        </p:spPr>
-        <p:style>
-          <a:lnRef idx="1">
-            <a:schemeClr val="accent1"/>
-          </a:lnRef>
-          <a:fillRef idx="3">
-            <a:schemeClr val="accent1"/>
-          </a:fillRef>
-          <a:effectRef idx="2">
-            <a:schemeClr val="accent1"/>
-          </a:effectRef>
-          <a:fontRef idx="minor">
-            <a:schemeClr val="lt1"/>
-          </a:fontRef>
-        </p:style>
-        <p:txBody>
-          <a:bodyPr rtlCol="0" anchor="ctr"/>
-          <a:lstStyle/>
-          <a:p>
-            <a:pPr algn="ctr"/>
-            <a:endParaRPr/>
-          </a:p>
-        </p:txBody>
-      </p:sp>
-      <p:sp>
-        <p:nvSpPr>
-          <p:cNvPr id="28" name="Rectangle 27"/>
-          <p:cNvSpPr/>
-          <p:nvPr/>
-        </p:nvSpPr>
-        <p:spPr>
-          <a:xfrm>
-            <a:off x="6208776" y="3703320"/>
-            <a:ext cx="3697224" cy="82296"/>
-          </a:xfrm>
-          <a:prstGeom prst="rect">
-            <a:avLst/>
-          </a:prstGeom>
-          <a:solidFill>
-            <a:srgbClr val="C77DFF"/>
-          </a:solidFill>
-          <a:ln>
-            <a:noFill/>
-          </a:ln>
-        </p:spPr>
-        <p:style>
-          <a:lnRef idx="1">
-            <a:schemeClr val="accent1"/>
-          </a:lnRef>
-          <a:fillRef idx="3">
-            <a:schemeClr val="accent1"/>
-          </a:fillRef>
-          <a:effectRef idx="2">
-            <a:schemeClr val="accent1"/>
-          </a:effectRef>
-          <a:fontRef idx="minor">
-            <a:schemeClr val="lt1"/>
-          </a:fontRef>
-        </p:style>
-        <p:txBody>
-          <a:bodyPr rtlCol="0" anchor="ctr"/>
-          <a:lstStyle/>
-          <a:p>
-            <a:pPr algn="ctr"/>
-            <a:endParaRPr/>
-          </a:p>
-        </p:txBody>
-      </p:sp>
-      <p:sp>
-        <p:nvSpPr>
-          <p:cNvPr id="29" name="TextBox 28"/>
-          <p:cNvSpPr txBox="1"/>
-          <p:nvPr/>
-        </p:nvSpPr>
-        <p:spPr>
-          <a:xfrm>
-            <a:off x="6373368" y="3813048"/>
-            <a:ext cx="3441192" cy="411480"/>
-          </a:xfrm>
-          <a:prstGeom prst="rect">
-            <a:avLst/>
-          </a:prstGeom>
-          <a:noFill/>
-        </p:spPr>
-        <p:txBody>
-          <a:bodyPr wrap="square">
-            <a:spAutoFit/>
-          </a:bodyPr>
-          <a:lstStyle/>
-          <a:p>
-            <a:pPr algn="ctr"/>
-            <a:r>
-              <a:rPr sz="1450" b="1" i="0">
-                <a:solidFill>
-                  <a:srgbClr val="C77DFF"/>
-                </a:solidFill>
-                <a:latin typeface="Segoe UI"/>
-              </a:rPr>
-              <a:t>Gated is Best for Custom</a:t>
-            </a:r>
-          </a:p>
-        </p:txBody>
-      </p:sp>
-      <p:sp>
-        <p:nvSpPr>
-          <p:cNvPr id="30" name="Rectangle 29"/>
-          <p:cNvSpPr/>
-          <p:nvPr/>
-        </p:nvSpPr>
-        <p:spPr>
-          <a:xfrm>
-            <a:off x="6437376" y="4288536"/>
-            <a:ext cx="3240024" cy="36576"/>
-          </a:xfrm>
-          <a:prstGeom prst="rect">
-            <a:avLst/>
-          </a:prstGeom>
-          <a:solidFill>
-            <a:srgbClr val="334466"/>
-          </a:solidFill>
-          <a:ln>
-            <a:noFill/>
-          </a:ln>
-        </p:spPr>
-        <p:style>
-          <a:lnRef idx="1">
-            <a:schemeClr val="accent1"/>
-          </a:lnRef>
-          <a:fillRef idx="3">
-            <a:schemeClr val="accent1"/>
-          </a:fillRef>
-          <a:effectRef idx="2">
-            <a:schemeClr val="accent1"/>
-          </a:effectRef>
-          <a:fontRef idx="minor">
-            <a:schemeClr val="lt1"/>
-          </a:fontRef>
-        </p:style>
-        <p:txBody>
-          <a:bodyPr rtlCol="0" anchor="ctr"/>
-          <a:lstStyle/>
-          <a:p>
-            <a:pPr algn="ctr"/>
-            <a:endParaRPr/>
-          </a:p>
-        </p:txBody>
-      </p:sp>
-      <p:sp>
-        <p:nvSpPr>
           <p:cNvPr id="31" name="TextBox 30"/>
           <p:cNvSpPr txBox="1"/>
           <p:nvPr/>
         </p:nvSpPr>
         <p:spPr>
           <a:xfrm>
-            <a:off x="6373368" y="4361688"/>
+            <a:off x="4410456" y="4343400"/>
             <a:ext cx="3441192" cy="1417320"/>
           </a:xfrm>
           <a:prstGeom prst="rect">
@@ -39153,4 +39836,319 @@
   </a:objectDefaults>
   <a:extraClrSchemeLst/>
 </a:theme>
+</file>
+
+<file path=ppt/theme/theme2.xml><?xml version="1.0" encoding="utf-8"?>
+<a:theme xmlns:a="http://schemas.openxmlformats.org/drawingml/2006/main" name="Office Teması">
+  <a:themeElements>
+    <a:clrScheme name="Office">
+      <a:dk1>
+        <a:sysClr val="windowText" lastClr="000000"/>
+      </a:dk1>
+      <a:lt1>
+        <a:sysClr val="window" lastClr="FFFFFF"/>
+      </a:lt1>
+      <a:dk2>
+        <a:srgbClr val="0E2841"/>
+      </a:dk2>
+      <a:lt2>
+        <a:srgbClr val="E8E8E8"/>
+      </a:lt2>
+      <a:accent1>
+        <a:srgbClr val="156082"/>
+      </a:accent1>
+      <a:accent2>
+        <a:srgbClr val="E97132"/>
+      </a:accent2>
+      <a:accent3>
+        <a:srgbClr val="196B24"/>
+      </a:accent3>
+      <a:accent4>
+        <a:srgbClr val="0F9ED5"/>
+      </a:accent4>
+      <a:accent5>
+        <a:srgbClr val="A02B93"/>
+      </a:accent5>
+      <a:accent6>
+        <a:srgbClr val="4EA72E"/>
+      </a:accent6>
+      <a:hlink>
+        <a:srgbClr val="467886"/>
+      </a:hlink>
+      <a:folHlink>
+        <a:srgbClr val="96607D"/>
+      </a:folHlink>
+    </a:clrScheme>
+    <a:fontScheme name="Office">
+      <a:majorFont>
+        <a:latin typeface="Aptos Display" panose="02110004020202020204"/>
+        <a:ea typeface=""/>
+        <a:cs typeface=""/>
+        <a:font script="Jpan" typeface="游ゴシック Light"/>
+        <a:font script="Hang" typeface="맑은 고딕"/>
+        <a:font script="Hans" typeface="等线 Light"/>
+        <a:font script="Hant" typeface="新細明體"/>
+        <a:font script="Arab" typeface="Times New Roman"/>
+        <a:font script="Hebr" typeface="Times New Roman"/>
+        <a:font script="Thai" typeface="Angsana New"/>
+        <a:font script="Ethi" typeface="Nyala"/>
+        <a:font script="Beng" typeface="Vrinda"/>
+        <a:font script="Gujr" typeface="Shruti"/>
+        <a:font script="Khmr" typeface="MoolBoran"/>
+        <a:font script="Knda" typeface="Tunga"/>
+        <a:font script="Guru" typeface="Raavi"/>
+        <a:font script="Cans" typeface="Euphemia"/>
+        <a:font script="Cher" typeface="Plantagenet Cherokee"/>
+        <a:font script="Yiii" typeface="Microsoft Yi Baiti"/>
+        <a:font script="Tibt" typeface="Microsoft Himalaya"/>
+        <a:font script="Thaa" typeface="MV Boli"/>
+        <a:font script="Deva" typeface="Mangal"/>
+        <a:font script="Telu" typeface="Gautami"/>
+        <a:font script="Taml" typeface="Latha"/>
+        <a:font script="Syrc" typeface="Estrangelo Edessa"/>
+        <a:font script="Orya" typeface="Kalinga"/>
+        <a:font script="Mlym" typeface="Kartika"/>
+        <a:font script="Laoo" typeface="DokChampa"/>
+        <a:font script="Sinh" typeface="Iskoola Pota"/>
+        <a:font script="Mong" typeface="Mongolian Baiti"/>
+        <a:font script="Viet" typeface="Times New Roman"/>
+        <a:font script="Uigh" typeface="Microsoft Uighur"/>
+        <a:font script="Geor" typeface="Sylfaen"/>
+        <a:font script="Armn" typeface="Arial"/>
+        <a:font script="Bugi" typeface="Leelawadee UI"/>
+        <a:font script="Bopo" typeface="Microsoft JhengHei"/>
+        <a:font script="Java" typeface="Javanese Text"/>
+        <a:font script="Lisu" typeface="Segoe UI"/>
+        <a:font script="Mymr" typeface="Myanmar Text"/>
+        <a:font script="Nkoo" typeface="Ebrima"/>
+        <a:font script="Olck" typeface="Nirmala UI"/>
+        <a:font script="Osma" typeface="Ebrima"/>
+        <a:font script="Phag" typeface="Phagspa"/>
+        <a:font script="Syrn" typeface="Estrangelo Edessa"/>
+        <a:font script="Syrj" typeface="Estrangelo Edessa"/>
+        <a:font script="Syre" typeface="Estrangelo Edessa"/>
+        <a:font script="Sora" typeface="Nirmala UI"/>
+        <a:font script="Tale" typeface="Microsoft Tai Le"/>
+        <a:font script="Talu" typeface="Microsoft New Tai Lue"/>
+        <a:font script="Tfng" typeface="Ebrima"/>
+      </a:majorFont>
+      <a:minorFont>
+        <a:latin typeface="Aptos" panose="02110004020202020204"/>
+        <a:ea typeface=""/>
+        <a:cs typeface=""/>
+        <a:font script="Jpan" typeface="游ゴシック"/>
+        <a:font script="Hang" typeface="맑은 고딕"/>
+        <a:font script="Hans" typeface="等线"/>
+        <a:font script="Hant" typeface="新細明體"/>
+        <a:font script="Arab" typeface="Arial"/>
+        <a:font script="Hebr" typeface="Arial"/>
+        <a:font script="Thai" typeface="Cordia New"/>
+        <a:font script="Ethi" typeface="Nyala"/>
+        <a:font script="Beng" typeface="Vrinda"/>
+        <a:font script="Gujr" typeface="Shruti"/>
+        <a:font script="Khmr" typeface="DaunPenh"/>
+        <a:font script="Knda" typeface="Tunga"/>
+        <a:font script="Guru" typeface="Raavi"/>
+        <a:font script="Cans" typeface="Euphemia"/>
+        <a:font script="Cher" typeface="Plantagenet Cherokee"/>
+        <a:font script="Yiii" typeface="Microsoft Yi Baiti"/>
+        <a:font script="Tibt" typeface="Microsoft Himalaya"/>
+        <a:font script="Thaa" typeface="MV Boli"/>
+        <a:font script="Deva" typeface="Mangal"/>
+        <a:font script="Telu" typeface="Gautami"/>
+        <a:font script="Taml" typeface="Latha"/>
+        <a:font script="Syrc" typeface="Estrangelo Edessa"/>
+        <a:font script="Orya" typeface="Kalinga"/>
+        <a:font script="Mlym" typeface="Kartika"/>
+        <a:font script="Laoo" typeface="DokChampa"/>
+        <a:font script="Sinh" typeface="Iskoola Pota"/>
+        <a:font script="Mong" typeface="Mongolian Baiti"/>
+        <a:font script="Viet" typeface="Arial"/>
+        <a:font script="Uigh" typeface="Microsoft Uighur"/>
+        <a:font script="Geor" typeface="Sylfaen"/>
+        <a:font script="Armn" typeface="Arial"/>
+        <a:font script="Bugi" typeface="Leelawadee UI"/>
+        <a:font script="Bopo" typeface="Microsoft JhengHei"/>
+        <a:font script="Java" typeface="Javanese Text"/>
+        <a:font script="Lisu" typeface="Segoe UI"/>
+        <a:font script="Mymr" typeface="Myanmar Text"/>
+        <a:font script="Nkoo" typeface="Ebrima"/>
+        <a:font script="Olck" typeface="Nirmala UI"/>
+        <a:font script="Osma" typeface="Ebrima"/>
+        <a:font script="Phag" typeface="Phagspa"/>
+        <a:font script="Syrn" typeface="Estrangelo Edessa"/>
+        <a:font script="Syrj" typeface="Estrangelo Edessa"/>
+        <a:font script="Syre" typeface="Estrangelo Edessa"/>
+        <a:font script="Sora" typeface="Nirmala UI"/>
+        <a:font script="Tale" typeface="Microsoft Tai Le"/>
+        <a:font script="Talu" typeface="Microsoft New Tai Lue"/>
+        <a:font script="Tfng" typeface="Ebrima"/>
+      </a:minorFont>
+    </a:fontScheme>
+    <a:fmtScheme name="Office">
+      <a:fillStyleLst>
+        <a:solidFill>
+          <a:schemeClr val="phClr"/>
+        </a:solidFill>
+        <a:gradFill rotWithShape="1">
+          <a:gsLst>
+            <a:gs pos="0">
+              <a:schemeClr val="phClr">
+                <a:lumMod val="110000"/>
+                <a:satMod val="105000"/>
+                <a:tint val="67000"/>
+              </a:schemeClr>
+            </a:gs>
+            <a:gs pos="50000">
+              <a:schemeClr val="phClr">
+                <a:lumMod val="105000"/>
+                <a:satMod val="103000"/>
+                <a:tint val="73000"/>
+              </a:schemeClr>
+            </a:gs>
+            <a:gs pos="100000">
+              <a:schemeClr val="phClr">
+                <a:lumMod val="105000"/>
+                <a:satMod val="109000"/>
+                <a:tint val="81000"/>
+              </a:schemeClr>
+            </a:gs>
+          </a:gsLst>
+          <a:lin ang="5400000" scaled="0"/>
+        </a:gradFill>
+        <a:gradFill rotWithShape="1">
+          <a:gsLst>
+            <a:gs pos="0">
+              <a:schemeClr val="phClr">
+                <a:satMod val="103000"/>
+                <a:lumMod val="102000"/>
+                <a:tint val="94000"/>
+              </a:schemeClr>
+            </a:gs>
+            <a:gs pos="50000">
+              <a:schemeClr val="phClr">
+                <a:satMod val="110000"/>
+                <a:lumMod val="100000"/>
+                <a:shade val="100000"/>
+              </a:schemeClr>
+            </a:gs>
+            <a:gs pos="100000">
+              <a:schemeClr val="phClr">
+                <a:lumMod val="99000"/>
+                <a:satMod val="120000"/>
+                <a:shade val="78000"/>
+              </a:schemeClr>
+            </a:gs>
+          </a:gsLst>
+          <a:lin ang="5400000" scaled="0"/>
+        </a:gradFill>
+      </a:fillStyleLst>
+      <a:lnStyleLst>
+        <a:ln w="12700" cap="flat" cmpd="sng" algn="ctr">
+          <a:solidFill>
+            <a:schemeClr val="phClr"/>
+          </a:solidFill>
+          <a:prstDash val="solid"/>
+          <a:miter lim="800000"/>
+        </a:ln>
+        <a:ln w="19050" cap="flat" cmpd="sng" algn="ctr">
+          <a:solidFill>
+            <a:schemeClr val="phClr"/>
+          </a:solidFill>
+          <a:prstDash val="solid"/>
+          <a:miter lim="800000"/>
+        </a:ln>
+        <a:ln w="25400" cap="flat" cmpd="sng" algn="ctr">
+          <a:solidFill>
+            <a:schemeClr val="phClr"/>
+          </a:solidFill>
+          <a:prstDash val="solid"/>
+          <a:miter lim="800000"/>
+        </a:ln>
+      </a:lnStyleLst>
+      <a:effectStyleLst>
+        <a:effectStyle>
+          <a:effectLst/>
+        </a:effectStyle>
+        <a:effectStyle>
+          <a:effectLst/>
+        </a:effectStyle>
+        <a:effectStyle>
+          <a:effectLst>
+            <a:outerShdw blurRad="57150" dist="19050" dir="5400000" algn="ctr" rotWithShape="0">
+              <a:srgbClr val="000000">
+                <a:alpha val="63000"/>
+              </a:srgbClr>
+            </a:outerShdw>
+          </a:effectLst>
+        </a:effectStyle>
+      </a:effectStyleLst>
+      <a:bgFillStyleLst>
+        <a:solidFill>
+          <a:schemeClr val="phClr"/>
+        </a:solidFill>
+        <a:solidFill>
+          <a:schemeClr val="phClr">
+            <a:tint val="95000"/>
+            <a:satMod val="170000"/>
+          </a:schemeClr>
+        </a:solidFill>
+        <a:gradFill rotWithShape="1">
+          <a:gsLst>
+            <a:gs pos="0">
+              <a:schemeClr val="phClr">
+                <a:tint val="93000"/>
+                <a:satMod val="150000"/>
+                <a:shade val="98000"/>
+                <a:lumMod val="102000"/>
+              </a:schemeClr>
+            </a:gs>
+            <a:gs pos="50000">
+              <a:schemeClr val="phClr">
+                <a:tint val="98000"/>
+                <a:satMod val="130000"/>
+                <a:shade val="90000"/>
+                <a:lumMod val="103000"/>
+              </a:schemeClr>
+            </a:gs>
+            <a:gs pos="100000">
+              <a:schemeClr val="phClr">
+                <a:shade val="63000"/>
+                <a:satMod val="120000"/>
+              </a:schemeClr>
+            </a:gs>
+          </a:gsLst>
+          <a:lin ang="5400000" scaled="0"/>
+        </a:gradFill>
+      </a:bgFillStyleLst>
+    </a:fmtScheme>
+  </a:themeElements>
+  <a:objectDefaults>
+    <a:lnDef>
+      <a:spPr/>
+      <a:bodyPr/>
+      <a:lstStyle/>
+      <a:style>
+        <a:lnRef idx="2">
+          <a:schemeClr val="accent1"/>
+        </a:lnRef>
+        <a:fillRef idx="0">
+          <a:schemeClr val="accent1"/>
+        </a:fillRef>
+        <a:effectRef idx="1">
+          <a:schemeClr val="accent1"/>
+        </a:effectRef>
+        <a:fontRef idx="minor">
+          <a:schemeClr val="tx1"/>
+        </a:fontRef>
+      </a:style>
+    </a:lnDef>
+  </a:objectDefaults>
+  <a:extraClrSchemeLst/>
+  <a:extLst>
+    <a:ext uri="{05A4C25C-085E-4340-85A3-A5531E510DB2}">
+      <thm15:themeFamily xmlns:thm15="http://schemas.microsoft.com/office/thememl/2012/main" name="Office Theme" id="{2E142A2C-CD16-42D6-873A-C26D2A0506FA}" vid="{1BDDFF52-6CD6-40A5-AB3C-68EB2F1E4D0A}"/>
+    </a:ext>
+  </a:extLst>
+</a:theme>
 </file>
--- a/CMPE597_Group13.pptx
+++ b/CMPE597_Group13.pptx
@@ -4105,13 +4105,13 @@
               <a:t>▶  </a:t>
             </a:r>
             <a:r>
-              <a:rPr lang="tr-TR" sz="1300" b="1" dirty="0" err="1">
+              <a:rPr lang="tr-TR" sz="1300" b="1" i="0" dirty="0" err="1">
                 <a:solidFill>
                   <a:srgbClr val="1A1A2E"/>
                 </a:solidFill>
                 <a:latin typeface="Segoe UI"/>
               </a:rPr>
-              <a:t>Now</a:t>
+              <a:t>Current</a:t>
             </a:r>
             <a:r>
               <a:rPr lang="tr-TR" sz="1300" b="1" dirty="0">
@@ -4120,16 +4120,7 @@
                 </a:solidFill>
                 <a:latin typeface="Segoe UI"/>
               </a:rPr>
-              <a:t> </a:t>
-            </a:r>
-            <a:r>
-              <a:rPr lang="tr-TR" sz="1300" b="1" dirty="0" err="1">
-                <a:solidFill>
-                  <a:srgbClr val="1A1A2E"/>
-                </a:solidFill>
-                <a:latin typeface="Segoe UI"/>
-              </a:rPr>
-              <a:t>Presenting</a:t>
+              <a:t> Presentation</a:t>
             </a:r>
             <a:endParaRPr sz="1300" b="1" i="0" dirty="0">
               <a:solidFill>
@@ -4431,7 +4422,7 @@
         <p:spPr>
           <a:xfrm>
             <a:off x="4892040" y="5082033"/>
-            <a:ext cx="2468880" cy="384048"/>
+            <a:ext cx="2468880" cy="292388"/>
           </a:xfrm>
           <a:prstGeom prst="rect">
             <a:avLst/>
@@ -4452,7 +4443,7 @@
                 </a:solidFill>
                 <a:latin typeface="Segoe UI"/>
               </a:rPr>
-              <a:t>Upcoming Presentations</a:t>
+              <a:t>Upcoming Presentation</a:t>
             </a:r>
           </a:p>
         </p:txBody>
@@ -4748,7 +4739,7 @@
         <p:spPr>
           <a:xfrm>
             <a:off x="8778240" y="5073566"/>
-            <a:ext cx="2468880" cy="384048"/>
+            <a:ext cx="2468880" cy="292388"/>
           </a:xfrm>
           <a:prstGeom prst="rect">
             <a:avLst/>
@@ -4769,7 +4760,7 @@
                 </a:solidFill>
                 <a:latin typeface="Segoe UI"/>
               </a:rPr>
-              <a:t>Upcoming Presentations</a:t>
+              <a:t>Upcoming Presentation</a:t>
             </a:r>
           </a:p>
         </p:txBody>
@@ -14999,7 +14990,7 @@
         </p:nvSpPr>
         <p:spPr>
           <a:xfrm>
-            <a:off x="1005840" y="5056632"/>
+            <a:off x="1005840" y="5082033"/>
             <a:ext cx="2468880" cy="384048"/>
           </a:xfrm>
           <a:prstGeom prst="rect">
@@ -15015,7 +15006,7 @@
           <a:p>
             <a:pPr algn="ctr"/>
             <a:r>
-              <a:rPr sz="1300" b="0" i="0">
+              <a:rPr sz="1300" b="0" i="0" dirty="0">
                 <a:solidFill>
                   <a:srgbClr val="66CC66"/>
                 </a:solidFill>
@@ -15316,7 +15307,7 @@
         </p:nvSpPr>
         <p:spPr>
           <a:xfrm>
-            <a:off x="4892040" y="5056632"/>
+            <a:off x="4892040" y="5090500"/>
             <a:ext cx="2468880" cy="384048"/>
           </a:xfrm>
           <a:prstGeom prst="rect">
@@ -15633,8 +15624,8 @@
         </p:nvSpPr>
         <p:spPr>
           <a:xfrm>
-            <a:off x="8778240" y="5056632"/>
-            <a:ext cx="2468880" cy="384048"/>
+            <a:off x="8778240" y="5090500"/>
+            <a:ext cx="2468880" cy="292388"/>
           </a:xfrm>
           <a:prstGeom prst="rect">
             <a:avLst/>
@@ -15649,14 +15640,47 @@
           <a:p>
             <a:pPr algn="ctr"/>
             <a:r>
-              <a:rPr sz="1300" b="1" i="0">
+              <a:rPr sz="1300" b="1" i="0" dirty="0">
                 <a:solidFill>
                   <a:srgbClr val="1A1A2E"/>
                 </a:solidFill>
                 <a:latin typeface="Segoe UI"/>
               </a:rPr>
-              <a:t>▶  Now Presenting</a:t>
-            </a:r>
+              <a:t>▶</a:t>
+            </a:r>
+            <a:r>
+              <a:rPr lang="tr-TR" sz="1300" b="1" i="0" dirty="0">
+                <a:solidFill>
+                  <a:srgbClr val="1A1A2E"/>
+                </a:solidFill>
+                <a:latin typeface="Segoe UI"/>
+              </a:rPr>
+              <a:t> </a:t>
+            </a:r>
+            <a:r>
+              <a:rPr lang="tr-TR" sz="1300" b="1" i="0" dirty="0" err="1">
+                <a:solidFill>
+                  <a:srgbClr val="1A1A2E"/>
+                </a:solidFill>
+                <a:latin typeface="Segoe UI"/>
+              </a:rPr>
+              <a:t>Current</a:t>
+            </a:r>
+            <a:r>
+              <a:rPr lang="tr-TR" sz="1300" b="1" i="0" dirty="0">
+                <a:solidFill>
+                  <a:srgbClr val="1A1A2E"/>
+                </a:solidFill>
+                <a:latin typeface="Segoe UI"/>
+              </a:rPr>
+              <a:t> Presentation</a:t>
+            </a:r>
+            <a:endParaRPr sz="1300" b="1" i="0" dirty="0">
+              <a:solidFill>
+                <a:srgbClr val="1A1A2E"/>
+              </a:solidFill>
+              <a:latin typeface="Segoe UI"/>
+            </a:endParaRPr>
           </a:p>
         </p:txBody>
       </p:sp>
@@ -21755,10 +21779,16 @@
           <p:cNvGraphicFramePr>
             <a:graphicFrameLocks noGrp="1"/>
           </p:cNvGraphicFramePr>
-          <p:nvPr/>
+          <p:nvPr>
+            <p:extLst>
+              <p:ext uri="{D42A27DB-BD31-4B8C-83A1-F6EECF244321}">
+                <p14:modId xmlns:p14="http://schemas.microsoft.com/office/powerpoint/2010/main" val="4202623619"/>
+              </p:ext>
+            </p:extLst>
+          </p:nvPr>
         </p:nvGraphicFramePr>
         <p:xfrm>
-          <a:off x="320040" y="1627632"/>
+          <a:off x="320040" y="1562778"/>
           <a:ext cx="11548872" cy="1158240"/>
         </p:xfrm>
         <a:graphic>
@@ -21805,7 +21835,7 @@
                     <a:p>
                       <a:pPr algn="ctr"/>
                       <a:r>
-                        <a:rPr sz="1300" b="1">
+                        <a:rPr sz="1300" b="1" dirty="0">
                           <a:solidFill>
                             <a:srgbClr val="FFFFFF"/>
                           </a:solidFill>
@@ -22171,7 +22201,7 @@
                     <a:p>
                       <a:pPr algn="ctr"/>
                       <a:r>
-                        <a:rPr sz="1300" b="1">
+                        <a:rPr sz="1300" b="1" dirty="0">
                           <a:solidFill>
                             <a:srgbClr val="06D6A0"/>
                           </a:solidFill>
@@ -22205,7 +22235,7 @@
         </p:nvSpPr>
         <p:spPr>
           <a:xfrm>
-            <a:off x="457200" y="2606040"/>
+            <a:off x="411480" y="2711027"/>
             <a:ext cx="3657600" cy="329184"/>
           </a:xfrm>
           <a:prstGeom prst="rect">
@@ -22221,7 +22251,7 @@
           <a:p>
             <a:pPr algn="l"/>
             <a:r>
-              <a:rPr sz="1400" b="1" i="0">
+              <a:rPr sz="1400" b="1" i="0" dirty="0">
                 <a:solidFill>
                   <a:srgbClr val="FFD600"/>
                 </a:solidFill>
@@ -23050,7 +23080,7 @@
                     <a:p>
                       <a:pPr algn="ctr"/>
                       <a:r>
-                        <a:rPr sz="1300" b="0">
+                        <a:rPr sz="1300" b="0" dirty="0">
                           <a:solidFill>
                             <a:srgbClr val="FFFFFF"/>
                           </a:solidFill>
@@ -38714,7 +38744,7 @@
         </p:nvSpPr>
         <p:spPr>
           <a:xfrm>
-            <a:off x="1005840" y="5056632"/>
+            <a:off x="1005840" y="5082033"/>
             <a:ext cx="2468880" cy="384048"/>
           </a:xfrm>
           <a:prstGeom prst="rect">
@@ -38987,8 +39017,8 @@
         </p:nvSpPr>
         <p:spPr>
           <a:xfrm>
-            <a:off x="4892040" y="5056632"/>
-            <a:ext cx="2468880" cy="384048"/>
+            <a:off x="4892040" y="5098967"/>
+            <a:ext cx="2468880" cy="292388"/>
           </a:xfrm>
           <a:prstGeom prst="rect">
             <a:avLst/>
@@ -39003,14 +39033,38 @@
           <a:p>
             <a:pPr algn="ctr"/>
             <a:r>
-              <a:rPr sz="1300" b="1" i="0" dirty="0">
+              <a:rPr lang="tr-TR" sz="1300" b="1" i="0" dirty="0">
                 <a:solidFill>
                   <a:srgbClr val="FFFFFF"/>
                 </a:solidFill>
                 <a:latin typeface="Segoe UI"/>
               </a:rPr>
-              <a:t>▶  Now Presenting</a:t>
-            </a:r>
+              <a:t>▶ </a:t>
+            </a:r>
+            <a:r>
+              <a:rPr lang="tr-TR" sz="1300" b="1" i="0" dirty="0" err="1">
+                <a:solidFill>
+                  <a:srgbClr val="FFFFFF"/>
+                </a:solidFill>
+                <a:latin typeface="Segoe UI"/>
+              </a:rPr>
+              <a:t>Current</a:t>
+            </a:r>
+            <a:r>
+              <a:rPr lang="tr-TR" sz="1300" b="1" i="0" dirty="0">
+                <a:solidFill>
+                  <a:srgbClr val="FFFFFF"/>
+                </a:solidFill>
+                <a:latin typeface="Segoe UI"/>
+              </a:rPr>
+              <a:t> Presentation</a:t>
+            </a:r>
+            <a:endParaRPr sz="1300" b="1" i="0" dirty="0">
+              <a:solidFill>
+                <a:srgbClr val="FFFFFF"/>
+              </a:solidFill>
+              <a:latin typeface="Segoe UI"/>
+            </a:endParaRPr>
           </a:p>
         </p:txBody>
       </p:sp>
@@ -39304,7 +39358,7 @@
         </p:nvSpPr>
         <p:spPr>
           <a:xfrm>
-            <a:off x="8778240" y="5056632"/>
+            <a:off x="8778240" y="5082033"/>
             <a:ext cx="2468880" cy="384048"/>
           </a:xfrm>
           <a:prstGeom prst="rect">
@@ -39320,7 +39374,7 @@
           <a:p>
             <a:pPr algn="ctr"/>
             <a:r>
-              <a:rPr sz="1300" b="0" i="0">
+              <a:rPr sz="1300" b="0" i="0" dirty="0">
                 <a:solidFill>
                   <a:srgbClr val="666688"/>
                 </a:solidFill>
